--- a/public/fun/pack/pptx/family/가족소개_38_3대가족_군고구마골목.pptx
+++ b/public/fun/pack/pptx/family/가족소개_38_3대가족_군고구마골목.pptx
@@ -3286,14 +3286,6 @@
 <file path=ppt/slides/slide1.xml><?xml version="1.0" encoding="utf-8"?>
 <p:sld xmlns:a="http://schemas.openxmlformats.org/drawingml/2006/main" xmlns:p="http://schemas.openxmlformats.org/presentationml/2006/main" xmlns:r="http://schemas.openxmlformats.org/officeDocument/2006/relationships">
   <p:cSld>
-    <p:bg>
-      <p:bgPr>
-        <a:solidFill>
-          <a:srgbClr val="FBF3EF"/>
-        </a:solidFill>
-        <a:effectLst/>
-      </p:bgPr>
-    </p:bg>
     <p:spTree>
       <p:nvGrpSpPr>
         <p:cNvPr id="1" name=""/>
@@ -3301,383 +3293,30 @@
         <p:nvPr/>
       </p:nvGrpSpPr>
       <p:grpSpPr/>
-      <p:sp>
-        <p:nvSpPr>
-          <p:cNvPr id="3" name="장식"/>
-          <p:cNvSpPr/>
+      <p:pic>
+        <p:nvPicPr>
+          <p:cNvPr id="3" name="표지 그림" descr="family-38.jpg"/>
+          <p:cNvPicPr>
+            <a:picLocks noChangeAspect="1"/>
+          </p:cNvPicPr>
           <p:nvPr/>
-        </p:nvSpPr>
-        <p:spPr>
-          <a:xfrm>
-            <a:off x="274320" y="274320"/>
-            <a:ext cx="11643055" cy="6309360"/>
+        </p:nvPicPr>
+        <p:blipFill>
+          <a:blip r:embed="rId2"/>
+          <a:stretch>
+            <a:fillRect/>
+          </a:stretch>
+        </p:blipFill>
+        <p:spPr>
+          <a:xfrm>
+            <a:off x="0" y="0"/>
+            <a:ext cx="12191695" cy="6858000"/>
           </a:xfrm>
           <a:prstGeom prst="rect">
             <a:avLst/>
           </a:prstGeom>
-          <a:noFill/>
-          <a:ln w="38100">
-            <a:solidFill>
-              <a:srgbClr val="995229"/>
-            </a:solidFill>
-          </a:ln>
-        </p:spPr>
-        <p:txBody>
-          <a:bodyPr rtlCol="0" anchor="ctr"/>
-          <a:lstStyle/>
-          <a:p>
-            <a:pPr algn="ctr"/>
-          </a:p>
-        </p:txBody>
-      </p:sp>
-      <p:sp>
-        <p:nvSpPr>
-          <p:cNvPr id="4" name="장식"/>
-          <p:cNvSpPr/>
-          <p:nvPr/>
-        </p:nvSpPr>
-        <p:spPr>
-          <a:xfrm>
-            <a:off x="457200" y="457200"/>
-            <a:ext cx="11277295" cy="5943600"/>
-          </a:xfrm>
-          <a:prstGeom prst="rect">
-            <a:avLst/>
-          </a:prstGeom>
-          <a:noFill/>
-          <a:ln w="12700">
-            <a:solidFill>
-              <a:srgbClr val="F4DBCD"/>
-            </a:solidFill>
-          </a:ln>
-        </p:spPr>
-        <p:txBody>
-          <a:bodyPr rtlCol="0" anchor="ctr"/>
-          <a:lstStyle/>
-          <a:p>
-            <a:pPr algn="ctr"/>
-          </a:p>
-        </p:txBody>
-      </p:sp>
-      <p:sp>
-        <p:nvSpPr>
-          <p:cNvPr id="5" name="장식"/>
-          <p:cNvSpPr/>
-          <p:nvPr/>
-        </p:nvSpPr>
-        <p:spPr>
-          <a:xfrm>
-            <a:off x="5854364" y="780551"/>
-            <a:ext cx="333470" cy="333470"/>
-          </a:xfrm>
-          <a:prstGeom prst="ellipse">
-            <a:avLst/>
-          </a:prstGeom>
-          <a:solidFill>
-            <a:srgbClr val="995229"/>
-          </a:solidFill>
-          <a:ln>
-            <a:noFill/>
-          </a:ln>
-        </p:spPr>
-        <p:txBody>
-          <a:bodyPr rtlCol="0" anchor="ctr"/>
-          <a:lstStyle/>
-          <a:p>
-            <a:pPr algn="ctr"/>
-          </a:p>
-        </p:txBody>
-      </p:sp>
-      <p:sp>
-        <p:nvSpPr>
-          <p:cNvPr id="6" name="장식"/>
-          <p:cNvSpPr/>
-          <p:nvPr/>
-        </p:nvSpPr>
-        <p:spPr>
-          <a:xfrm>
-            <a:off x="6892061" y="1623191"/>
-            <a:ext cx="200163" cy="200163"/>
-          </a:xfrm>
-          <a:prstGeom prst="ellipse">
-            <a:avLst/>
-          </a:prstGeom>
-          <a:solidFill>
-            <a:srgbClr val="F4DBCD"/>
-          </a:solidFill>
-          <a:ln>
-            <a:noFill/>
-          </a:ln>
-        </p:spPr>
-        <p:txBody>
-          <a:bodyPr rtlCol="0" anchor="ctr"/>
-          <a:lstStyle/>
-          <a:p>
-            <a:pPr algn="ctr"/>
-          </a:p>
-        </p:txBody>
-      </p:sp>
-      <p:sp>
-        <p:nvSpPr>
-          <p:cNvPr id="7" name="장식"/>
-          <p:cNvSpPr/>
-          <p:nvPr/>
-        </p:nvSpPr>
-        <p:spPr>
-          <a:xfrm>
-            <a:off x="5120089" y="1161505"/>
-            <a:ext cx="263527" cy="263527"/>
-          </a:xfrm>
-          <a:prstGeom prst="ellipse">
-            <a:avLst/>
-          </a:prstGeom>
-          <a:solidFill>
-            <a:srgbClr val="3B9185"/>
-          </a:solidFill>
-          <a:ln>
-            <a:noFill/>
-          </a:ln>
-        </p:spPr>
-        <p:txBody>
-          <a:bodyPr rtlCol="0" anchor="ctr"/>
-          <a:lstStyle/>
-          <a:p>
-            <a:pPr algn="ctr"/>
-          </a:p>
-        </p:txBody>
-      </p:sp>
-      <p:sp>
-        <p:nvSpPr>
-          <p:cNvPr id="8" name="장식"/>
-          <p:cNvSpPr/>
-          <p:nvPr/>
-        </p:nvSpPr>
-        <p:spPr>
-          <a:xfrm>
-            <a:off x="6364859" y="758859"/>
-            <a:ext cx="216496" cy="216496"/>
-          </a:xfrm>
-          <a:prstGeom prst="ellipse">
-            <a:avLst/>
-          </a:prstGeom>
-          <a:solidFill>
-            <a:srgbClr val="995229"/>
-          </a:solidFill>
-          <a:ln>
-            <a:noFill/>
-          </a:ln>
-        </p:spPr>
-        <p:txBody>
-          <a:bodyPr rtlCol="0" anchor="ctr"/>
-          <a:lstStyle/>
-          <a:p>
-            <a:pPr algn="ctr"/>
-          </a:p>
-        </p:txBody>
-      </p:sp>
-      <p:sp>
-        <p:nvSpPr>
-          <p:cNvPr id="9" name="장식"/>
-          <p:cNvSpPr/>
-          <p:nvPr/>
-        </p:nvSpPr>
-        <p:spPr>
-          <a:xfrm>
-            <a:off x="6068545" y="360190"/>
-            <a:ext cx="334832" cy="334832"/>
-          </a:xfrm>
-          <a:prstGeom prst="ellipse">
-            <a:avLst/>
-          </a:prstGeom>
-          <a:solidFill>
-            <a:srgbClr val="F4DBCD"/>
-          </a:solidFill>
-          <a:ln>
-            <a:noFill/>
-          </a:ln>
-        </p:spPr>
-        <p:txBody>
-          <a:bodyPr rtlCol="0" anchor="ctr"/>
-          <a:lstStyle/>
-          <a:p>
-            <a:pPr algn="ctr"/>
-          </a:p>
-        </p:txBody>
-      </p:sp>
-      <p:sp>
-        <p:nvSpPr>
-          <p:cNvPr id="10" name="장식"/>
-          <p:cNvSpPr/>
-          <p:nvPr/>
-        </p:nvSpPr>
-        <p:spPr>
-          <a:xfrm>
-            <a:off x="5437401" y="825259"/>
-            <a:ext cx="143688" cy="143688"/>
-          </a:xfrm>
-          <a:prstGeom prst="ellipse">
-            <a:avLst/>
-          </a:prstGeom>
-          <a:solidFill>
-            <a:srgbClr val="3B9185"/>
-          </a:solidFill>
-          <a:ln>
-            <a:noFill/>
-          </a:ln>
-        </p:spPr>
-        <p:txBody>
-          <a:bodyPr rtlCol="0" anchor="ctr"/>
-          <a:lstStyle/>
-          <a:p>
-            <a:pPr algn="ctr"/>
-          </a:p>
-        </p:txBody>
-      </p:sp>
-      <p:sp>
-        <p:nvSpPr>
-          <p:cNvPr id="11" name="장식"/>
-          <p:cNvSpPr/>
-          <p:nvPr/>
-        </p:nvSpPr>
-        <p:spPr>
-          <a:xfrm>
-            <a:off x="6550618" y="2104327"/>
-            <a:ext cx="285402" cy="285402"/>
-          </a:xfrm>
-          <a:prstGeom prst="ellipse">
-            <a:avLst/>
-          </a:prstGeom>
-          <a:solidFill>
-            <a:srgbClr val="995229"/>
-          </a:solidFill>
-          <a:ln>
-            <a:noFill/>
-          </a:ln>
-        </p:spPr>
-        <p:txBody>
-          <a:bodyPr rtlCol="0" anchor="ctr"/>
-          <a:lstStyle/>
-          <a:p>
-            <a:pPr algn="ctr"/>
-          </a:p>
-        </p:txBody>
-      </p:sp>
-      <p:sp>
-        <p:nvSpPr>
-          <p:cNvPr id="12" name="장식"/>
-          <p:cNvSpPr/>
-          <p:nvPr/>
-        </p:nvSpPr>
-        <p:spPr>
-          <a:xfrm>
-            <a:off x="6115670" y="917740"/>
-            <a:ext cx="267797" cy="267797"/>
-          </a:xfrm>
-          <a:prstGeom prst="ellipse">
-            <a:avLst/>
-          </a:prstGeom>
-          <a:solidFill>
-            <a:srgbClr val="F4DBCD"/>
-          </a:solidFill>
-          <a:ln>
-            <a:noFill/>
-          </a:ln>
-        </p:spPr>
-        <p:txBody>
-          <a:bodyPr rtlCol="0" anchor="ctr"/>
-          <a:lstStyle/>
-          <a:p>
-            <a:pPr algn="ctr"/>
-          </a:p>
-        </p:txBody>
-      </p:sp>
-      <p:sp>
-        <p:nvSpPr>
-          <p:cNvPr id="13" name="장식"/>
-          <p:cNvSpPr/>
-          <p:nvPr/>
-        </p:nvSpPr>
-        <p:spPr>
-          <a:xfrm>
-            <a:off x="6642241" y="1444838"/>
-            <a:ext cx="284342" cy="284342"/>
-          </a:xfrm>
-          <a:prstGeom prst="ellipse">
-            <a:avLst/>
-          </a:prstGeom>
-          <a:solidFill>
-            <a:srgbClr val="3B9185"/>
-          </a:solidFill>
-          <a:ln>
-            <a:noFill/>
-          </a:ln>
-        </p:spPr>
-        <p:txBody>
-          <a:bodyPr rtlCol="0" anchor="ctr"/>
-          <a:lstStyle/>
-          <a:p>
-            <a:pPr algn="ctr"/>
-          </a:p>
-        </p:txBody>
-      </p:sp>
-      <p:sp>
-        <p:nvSpPr>
-          <p:cNvPr id="14" name="장식"/>
-          <p:cNvSpPr/>
-          <p:nvPr/>
-        </p:nvSpPr>
-        <p:spPr>
-          <a:xfrm>
-            <a:off x="5561757" y="750724"/>
-            <a:ext cx="180660" cy="180660"/>
-          </a:xfrm>
-          <a:prstGeom prst="ellipse">
-            <a:avLst/>
-          </a:prstGeom>
-          <a:solidFill>
-            <a:srgbClr val="995229"/>
-          </a:solidFill>
-          <a:ln>
-            <a:noFill/>
-          </a:ln>
-        </p:spPr>
-        <p:txBody>
-          <a:bodyPr rtlCol="0" anchor="ctr"/>
-          <a:lstStyle/>
-          <a:p>
-            <a:pPr algn="ctr"/>
-          </a:p>
-        </p:txBody>
-      </p:sp>
-      <p:sp>
-        <p:nvSpPr>
-          <p:cNvPr id="15" name="장식"/>
-          <p:cNvSpPr/>
-          <p:nvPr/>
-        </p:nvSpPr>
-        <p:spPr>
-          <a:xfrm>
-            <a:off x="5279103" y="941758"/>
-            <a:ext cx="124614" cy="124614"/>
-          </a:xfrm>
-          <a:prstGeom prst="ellipse">
-            <a:avLst/>
-          </a:prstGeom>
-          <a:solidFill>
-            <a:srgbClr val="F4DBCD"/>
-          </a:solidFill>
-          <a:ln>
-            <a:noFill/>
-          </a:ln>
-        </p:spPr>
-        <p:txBody>
-          <a:bodyPr rtlCol="0" anchor="ctr"/>
-          <a:lstStyle/>
-          <a:p>
-            <a:pPr algn="ctr"/>
-          </a:p>
-        </p:txBody>
-      </p:sp>
+        </p:spPr>
+      </p:pic>
       <p:sp>
         <p:nvSpPr>
           <p:cNvPr id="2" name="Title 1"/>
@@ -3690,8 +3329,8 @@
         </p:nvSpPr>
         <p:spPr>
           <a:xfrm>
-            <a:off x="1463003" y="2331720"/>
-            <a:ext cx="9265688" cy="1371600"/>
+            <a:off x="853418" y="2057400"/>
+            <a:ext cx="6095847" cy="1554480"/>
           </a:xfrm>
         </p:spPr>
         <p:txBody>
@@ -3700,7 +3339,7 @@
           </a:bodyPr>
           <a:lstStyle/>
           <a:p>
-            <a:pPr algn="ctr">
+            <a:pPr algn="l">
               <a:lnSpc>
                 <a:spcPct val="105000"/>
               </a:lnSpc>
@@ -3718,14 +3357,14 @@
       </p:sp>
       <p:sp>
         <p:nvSpPr>
-          <p:cNvPr id="16" name="한 줄 문구"/>
+          <p:cNvPr id="4" name="한 줄 문구"/>
           <p:cNvSpPr txBox="1"/>
           <p:nvPr/>
         </p:nvSpPr>
         <p:spPr>
           <a:xfrm>
-            <a:off x="1463003" y="3794760"/>
-            <a:ext cx="9265688" cy="822960"/>
+            <a:off x="853418" y="3749039"/>
+            <a:ext cx="6095847" cy="822960"/>
           </a:xfrm>
           <a:prstGeom prst="rect">
             <a:avLst/>
@@ -3738,7 +3377,7 @@
           </a:bodyPr>
           <a:lstStyle/>
           <a:p>
-            <a:pPr algn="ctr">
+            <a:pPr algn="l">
               <a:lnSpc>
                 <a:spcPct val="115000"/>
               </a:lnSpc>
@@ -3749,21 +3388,21 @@
                   <a:srgbClr val="492713"/>
                 </a:solidFill>
               </a:rPr>
-              <a:t>군고구마 냄새가 번지던 우리 집</a:t>
-            </a:r>
-          </a:p>
-        </p:txBody>
-      </p:sp>
-      <p:sp>
-        <p:nvSpPr>
-          <p:cNvPr id="17" name="안내 문구"/>
+              <a:t>군고구마 한 봉지 나눠 들고</a:t>
+            </a:r>
+          </a:p>
+        </p:txBody>
+      </p:sp>
+      <p:sp>
+        <p:nvSpPr>
+          <p:cNvPr id="5" name="안내 문구"/>
           <p:cNvSpPr txBox="1"/>
           <p:nvPr/>
         </p:nvSpPr>
         <p:spPr>
           <a:xfrm>
-            <a:off x="1463003" y="4663440"/>
-            <a:ext cx="9265688" cy="914400"/>
+            <a:off x="853418" y="4617720"/>
+            <a:ext cx="6095847" cy="914400"/>
           </a:xfrm>
           <a:prstGeom prst="rect">
             <a:avLst/>
@@ -3776,7 +3415,7 @@
           </a:bodyPr>
           <a:lstStyle/>
           <a:p>
-            <a:pPr algn="ctr">
+            <a:pPr algn="l">
               <a:lnSpc>
                 <a:spcPct val="115000"/>
               </a:lnSpc>
@@ -3787,7 +3426,7 @@
                   <a:srgbClr val="666666"/>
                 </a:solidFill>
               </a:rPr>
-              <a:t>3대 가족 · 2026. 00. 00</a:t>
+              <a:t>3대 가족 · 2027. 00. 00</a:t>
             </a:r>
           </a:p>
         </p:txBody>
@@ -3878,325 +3517,6 @@
       </p:sp>
       <p:sp>
         <p:nvSpPr>
-          <p:cNvPr id="5" name="장식"/>
-          <p:cNvSpPr/>
-          <p:nvPr/>
-        </p:nvSpPr>
-        <p:spPr>
-          <a:xfrm>
-            <a:off x="10914538" y="631759"/>
-            <a:ext cx="185261" cy="185261"/>
-          </a:xfrm>
-          <a:prstGeom prst="ellipse">
-            <a:avLst/>
-          </a:prstGeom>
-          <a:solidFill>
-            <a:srgbClr val="995229"/>
-          </a:solidFill>
-          <a:ln>
-            <a:noFill/>
-          </a:ln>
-        </p:spPr>
-        <p:txBody>
-          <a:bodyPr rtlCol="0" anchor="ctr"/>
-          <a:lstStyle/>
-          <a:p>
-            <a:pPr algn="ctr"/>
-          </a:p>
-        </p:txBody>
-      </p:sp>
-      <p:sp>
-        <p:nvSpPr>
-          <p:cNvPr id="6" name="장식"/>
-          <p:cNvSpPr/>
-          <p:nvPr/>
-        </p:nvSpPr>
-        <p:spPr>
-          <a:xfrm>
-            <a:off x="11491036" y="1099893"/>
-            <a:ext cx="111201" cy="111201"/>
-          </a:xfrm>
-          <a:prstGeom prst="ellipse">
-            <a:avLst/>
-          </a:prstGeom>
-          <a:solidFill>
-            <a:srgbClr val="F4DBCD"/>
-          </a:solidFill>
-          <a:ln>
-            <a:noFill/>
-          </a:ln>
-        </p:spPr>
-        <p:txBody>
-          <a:bodyPr rtlCol="0" anchor="ctr"/>
-          <a:lstStyle/>
-          <a:p>
-            <a:pPr algn="ctr"/>
-          </a:p>
-        </p:txBody>
-      </p:sp>
-      <p:sp>
-        <p:nvSpPr>
-          <p:cNvPr id="7" name="장식"/>
-          <p:cNvSpPr/>
-          <p:nvPr/>
-        </p:nvSpPr>
-        <p:spPr>
-          <a:xfrm>
-            <a:off x="10506607" y="843400"/>
-            <a:ext cx="146404" cy="146404"/>
-          </a:xfrm>
-          <a:prstGeom prst="ellipse">
-            <a:avLst/>
-          </a:prstGeom>
-          <a:solidFill>
-            <a:srgbClr val="3B9185"/>
-          </a:solidFill>
-          <a:ln>
-            <a:noFill/>
-          </a:ln>
-        </p:spPr>
-        <p:txBody>
-          <a:bodyPr rtlCol="0" anchor="ctr"/>
-          <a:lstStyle/>
-          <a:p>
-            <a:pPr algn="ctr"/>
-          </a:p>
-        </p:txBody>
-      </p:sp>
-      <p:sp>
-        <p:nvSpPr>
-          <p:cNvPr id="8" name="장식"/>
-          <p:cNvSpPr/>
-          <p:nvPr/>
-        </p:nvSpPr>
-        <p:spPr>
-          <a:xfrm>
-            <a:off x="11198146" y="619708"/>
-            <a:ext cx="120275" cy="120275"/>
-          </a:xfrm>
-          <a:prstGeom prst="ellipse">
-            <a:avLst/>
-          </a:prstGeom>
-          <a:solidFill>
-            <a:srgbClr val="995229"/>
-          </a:solidFill>
-          <a:ln>
-            <a:noFill/>
-          </a:ln>
-        </p:spPr>
-        <p:txBody>
-          <a:bodyPr rtlCol="0" anchor="ctr"/>
-          <a:lstStyle/>
-          <a:p>
-            <a:pPr algn="ctr"/>
-          </a:p>
-        </p:txBody>
-      </p:sp>
-      <p:sp>
-        <p:nvSpPr>
-          <p:cNvPr id="9" name="장식"/>
-          <p:cNvSpPr/>
-          <p:nvPr/>
-        </p:nvSpPr>
-        <p:spPr>
-          <a:xfrm>
-            <a:off x="11033527" y="398225"/>
-            <a:ext cx="186017" cy="186017"/>
-          </a:xfrm>
-          <a:prstGeom prst="ellipse">
-            <a:avLst/>
-          </a:prstGeom>
-          <a:solidFill>
-            <a:srgbClr val="F4DBCD"/>
-          </a:solidFill>
-          <a:ln>
-            <a:noFill/>
-          </a:ln>
-        </p:spPr>
-        <p:txBody>
-          <a:bodyPr rtlCol="0" anchor="ctr"/>
-          <a:lstStyle/>
-          <a:p>
-            <a:pPr algn="ctr"/>
-          </a:p>
-        </p:txBody>
-      </p:sp>
-      <p:sp>
-        <p:nvSpPr>
-          <p:cNvPr id="10" name="장식"/>
-          <p:cNvSpPr/>
-          <p:nvPr/>
-        </p:nvSpPr>
-        <p:spPr>
-          <a:xfrm>
-            <a:off x="10682891" y="656597"/>
-            <a:ext cx="79826" cy="79826"/>
-          </a:xfrm>
-          <a:prstGeom prst="ellipse">
-            <a:avLst/>
-          </a:prstGeom>
-          <a:solidFill>
-            <a:srgbClr val="3B9185"/>
-          </a:solidFill>
-          <a:ln>
-            <a:noFill/>
-          </a:ln>
-        </p:spPr>
-        <p:txBody>
-          <a:bodyPr rtlCol="0" anchor="ctr"/>
-          <a:lstStyle/>
-          <a:p>
-            <a:pPr algn="ctr"/>
-          </a:p>
-        </p:txBody>
-      </p:sp>
-      <p:sp>
-        <p:nvSpPr>
-          <p:cNvPr id="11" name="장식"/>
-          <p:cNvSpPr/>
-          <p:nvPr/>
-        </p:nvSpPr>
-        <p:spPr>
-          <a:xfrm>
-            <a:off x="11301345" y="1367190"/>
-            <a:ext cx="158557" cy="158557"/>
-          </a:xfrm>
-          <a:prstGeom prst="ellipse">
-            <a:avLst/>
-          </a:prstGeom>
-          <a:solidFill>
-            <a:srgbClr val="995229"/>
-          </a:solidFill>
-          <a:ln>
-            <a:noFill/>
-          </a:ln>
-        </p:spPr>
-        <p:txBody>
-          <a:bodyPr rtlCol="0" anchor="ctr"/>
-          <a:lstStyle/>
-          <a:p>
-            <a:pPr algn="ctr"/>
-          </a:p>
-        </p:txBody>
-      </p:sp>
-      <p:sp>
-        <p:nvSpPr>
-          <p:cNvPr id="12" name="장식"/>
-          <p:cNvSpPr/>
-          <p:nvPr/>
-        </p:nvSpPr>
-        <p:spPr>
-          <a:xfrm>
-            <a:off x="11059707" y="707976"/>
-            <a:ext cx="148776" cy="148776"/>
-          </a:xfrm>
-          <a:prstGeom prst="ellipse">
-            <a:avLst/>
-          </a:prstGeom>
-          <a:solidFill>
-            <a:srgbClr val="F4DBCD"/>
-          </a:solidFill>
-          <a:ln>
-            <a:noFill/>
-          </a:ln>
-        </p:spPr>
-        <p:txBody>
-          <a:bodyPr rtlCol="0" anchor="ctr"/>
-          <a:lstStyle/>
-          <a:p>
-            <a:pPr algn="ctr"/>
-          </a:p>
-        </p:txBody>
-      </p:sp>
-      <p:sp>
-        <p:nvSpPr>
-          <p:cNvPr id="13" name="장식"/>
-          <p:cNvSpPr/>
-          <p:nvPr/>
-        </p:nvSpPr>
-        <p:spPr>
-          <a:xfrm>
-            <a:off x="11352247" y="1000807"/>
-            <a:ext cx="157967" cy="157967"/>
-          </a:xfrm>
-          <a:prstGeom prst="ellipse">
-            <a:avLst/>
-          </a:prstGeom>
-          <a:solidFill>
-            <a:srgbClr val="3B9185"/>
-          </a:solidFill>
-          <a:ln>
-            <a:noFill/>
-          </a:ln>
-        </p:spPr>
-        <p:txBody>
-          <a:bodyPr rtlCol="0" anchor="ctr"/>
-          <a:lstStyle/>
-          <a:p>
-            <a:pPr algn="ctr"/>
-          </a:p>
-        </p:txBody>
-      </p:sp>
-      <p:sp>
-        <p:nvSpPr>
-          <p:cNvPr id="14" name="장식"/>
-          <p:cNvSpPr/>
-          <p:nvPr/>
-        </p:nvSpPr>
-        <p:spPr>
-          <a:xfrm>
-            <a:off x="10751978" y="615189"/>
-            <a:ext cx="100367" cy="100367"/>
-          </a:xfrm>
-          <a:prstGeom prst="ellipse">
-            <a:avLst/>
-          </a:prstGeom>
-          <a:solidFill>
-            <a:srgbClr val="995229"/>
-          </a:solidFill>
-          <a:ln>
-            <a:noFill/>
-          </a:ln>
-        </p:spPr>
-        <p:txBody>
-          <a:bodyPr rtlCol="0" anchor="ctr"/>
-          <a:lstStyle/>
-          <a:p>
-            <a:pPr algn="ctr"/>
-          </a:p>
-        </p:txBody>
-      </p:sp>
-      <p:sp>
-        <p:nvSpPr>
-          <p:cNvPr id="15" name="장식"/>
-          <p:cNvSpPr/>
-          <p:nvPr/>
-        </p:nvSpPr>
-        <p:spPr>
-          <a:xfrm>
-            <a:off x="10594948" y="721318"/>
-            <a:ext cx="69230" cy="69230"/>
-          </a:xfrm>
-          <a:prstGeom prst="ellipse">
-            <a:avLst/>
-          </a:prstGeom>
-          <a:solidFill>
-            <a:srgbClr val="F4DBCD"/>
-          </a:solidFill>
-          <a:ln>
-            <a:noFill/>
-          </a:ln>
-        </p:spPr>
-        <p:txBody>
-          <a:bodyPr rtlCol="0" anchor="ctr"/>
-          <a:lstStyle/>
-          <a:p>
-            <a:pPr algn="ctr"/>
-          </a:p>
-        </p:txBody>
-      </p:sp>
-      <p:sp>
-        <p:nvSpPr>
           <p:cNvPr id="2" name="Title 1"/>
           <p:cNvSpPr>
             <a:spLocks noGrp="1"/>
@@ -4235,7 +3555,7 @@
       </p:sp>
       <p:sp>
         <p:nvSpPr>
-          <p:cNvPr id="16" name="사진 자리"/>
+          <p:cNvPr id="5" name="사진 자리"/>
           <p:cNvSpPr/>
           <p:nvPr/>
         </p:nvSpPr>
@@ -4281,7 +3601,7 @@
       </p:sp>
       <p:sp>
         <p:nvSpPr>
-          <p:cNvPr id="17" name="TextBox 16"/>
+          <p:cNvPr id="6" name="TextBox 5"/>
           <p:cNvSpPr txBox="1"/>
           <p:nvPr/>
         </p:nvSpPr>
@@ -4319,7 +3639,7 @@
       </p:sp>
       <p:sp>
         <p:nvSpPr>
-          <p:cNvPr id="18" name="TextBox 17"/>
+          <p:cNvPr id="7" name="TextBox 6"/>
           <p:cNvSpPr txBox="1"/>
           <p:nvPr/>
         </p:nvSpPr>
@@ -4387,7 +3707,7 @@
       </p:sp>
       <p:sp>
         <p:nvSpPr>
-          <p:cNvPr id="19" name="사진 자리"/>
+          <p:cNvPr id="8" name="사진 자리"/>
           <p:cNvSpPr/>
           <p:nvPr/>
         </p:nvSpPr>
@@ -4433,7 +3753,7 @@
       </p:sp>
       <p:sp>
         <p:nvSpPr>
-          <p:cNvPr id="20" name="TextBox 19"/>
+          <p:cNvPr id="9" name="TextBox 8"/>
           <p:cNvSpPr txBox="1"/>
           <p:nvPr/>
         </p:nvSpPr>
@@ -4471,7 +3791,7 @@
       </p:sp>
       <p:sp>
         <p:nvSpPr>
-          <p:cNvPr id="21" name="TextBox 20"/>
+          <p:cNvPr id="10" name="TextBox 9"/>
           <p:cNvSpPr txBox="1"/>
           <p:nvPr/>
         </p:nvSpPr>
@@ -4539,7 +3859,7 @@
       </p:sp>
       <p:sp>
         <p:nvSpPr>
-          <p:cNvPr id="22" name="사진 자리"/>
+          <p:cNvPr id="11" name="사진 자리"/>
           <p:cNvSpPr/>
           <p:nvPr/>
         </p:nvSpPr>
@@ -4585,7 +3905,7 @@
       </p:sp>
       <p:sp>
         <p:nvSpPr>
-          <p:cNvPr id="23" name="TextBox 22"/>
+          <p:cNvPr id="12" name="TextBox 11"/>
           <p:cNvSpPr txBox="1"/>
           <p:nvPr/>
         </p:nvSpPr>
@@ -4623,7 +3943,7 @@
       </p:sp>
       <p:sp>
         <p:nvSpPr>
-          <p:cNvPr id="24" name="TextBox 23"/>
+          <p:cNvPr id="13" name="TextBox 12"/>
           <p:cNvSpPr txBox="1"/>
           <p:nvPr/>
         </p:nvSpPr>
@@ -4691,7 +4011,7 @@
       </p:sp>
       <p:sp>
         <p:nvSpPr>
-          <p:cNvPr id="25" name="사진 자리"/>
+          <p:cNvPr id="14" name="사진 자리"/>
           <p:cNvSpPr/>
           <p:nvPr/>
         </p:nvSpPr>
@@ -4737,7 +4057,7 @@
       </p:sp>
       <p:sp>
         <p:nvSpPr>
-          <p:cNvPr id="26" name="TextBox 25"/>
+          <p:cNvPr id="15" name="TextBox 14"/>
           <p:cNvSpPr txBox="1"/>
           <p:nvPr/>
         </p:nvSpPr>
@@ -4775,7 +4095,7 @@
       </p:sp>
       <p:sp>
         <p:nvSpPr>
-          <p:cNvPr id="27" name="TextBox 26"/>
+          <p:cNvPr id="16" name="TextBox 15"/>
           <p:cNvSpPr txBox="1"/>
           <p:nvPr/>
         </p:nvSpPr>
@@ -4843,7 +4163,7 @@
       </p:sp>
       <p:sp>
         <p:nvSpPr>
-          <p:cNvPr id="28" name="사진 자리"/>
+          <p:cNvPr id="17" name="사진 자리"/>
           <p:cNvSpPr/>
           <p:nvPr/>
         </p:nvSpPr>
@@ -4889,7 +4209,7 @@
       </p:sp>
       <p:sp>
         <p:nvSpPr>
-          <p:cNvPr id="29" name="TextBox 28"/>
+          <p:cNvPr id="18" name="TextBox 17"/>
           <p:cNvSpPr txBox="1"/>
           <p:nvPr/>
         </p:nvSpPr>
@@ -4927,7 +4247,7 @@
       </p:sp>
       <p:sp>
         <p:nvSpPr>
-          <p:cNvPr id="30" name="TextBox 29"/>
+          <p:cNvPr id="19" name="TextBox 18"/>
           <p:cNvSpPr txBox="1"/>
           <p:nvPr/>
         </p:nvSpPr>
@@ -4995,7 +4315,7 @@
       </p:sp>
       <p:sp>
         <p:nvSpPr>
-          <p:cNvPr id="31" name="사진 자리"/>
+          <p:cNvPr id="20" name="사진 자리"/>
           <p:cNvSpPr/>
           <p:nvPr/>
         </p:nvSpPr>
@@ -5041,7 +4361,7 @@
       </p:sp>
       <p:sp>
         <p:nvSpPr>
-          <p:cNvPr id="32" name="TextBox 31"/>
+          <p:cNvPr id="21" name="TextBox 20"/>
           <p:cNvSpPr txBox="1"/>
           <p:nvPr/>
         </p:nvSpPr>
@@ -5079,7 +4399,7 @@
       </p:sp>
       <p:sp>
         <p:nvSpPr>
-          <p:cNvPr id="33" name="TextBox 32"/>
+          <p:cNvPr id="22" name="TextBox 21"/>
           <p:cNvSpPr txBox="1"/>
           <p:nvPr/>
         </p:nvSpPr>
@@ -5231,45 +4551,54 @@
       </p:sp>
       <p:sp>
         <p:nvSpPr>
-          <p:cNvPr id="5" name="장식"/>
+          <p:cNvPr id="2" name="Title 1"/>
+          <p:cNvSpPr>
+            <a:spLocks noGrp="1"/>
+          </p:cNvSpPr>
+          <p:nvPr>
+            <p:ph type="title"/>
+          </p:nvPr>
+        </p:nvSpPr>
+        <p:spPr>
+          <a:xfrm>
+            <a:off x="822960" y="548640"/>
+            <a:ext cx="9265615" cy="822960"/>
+          </a:xfrm>
+        </p:spPr>
+        <p:txBody>
+          <a:bodyPr wrap="square" lIns="54864" rIns="54864" tIns="27432" bIns="27432" anchor="ctr">
+            <a:noAutofit/>
+          </a:bodyPr>
+          <a:lstStyle/>
+          <a:p>
+            <a:pPr algn="l">
+              <a:lnSpc>
+                <a:spcPct val="105000"/>
+              </a:lnSpc>
+            </a:pPr>
+            <a:r>
+              <a:rPr sz="3000" b="1" i="0">
+                <a:solidFill>
+                  <a:srgbClr val="492713"/>
+                </a:solidFill>
+              </a:rPr>
+              <a:t>우리 가족 이야기</a:t>
+            </a:r>
+          </a:p>
+        </p:txBody>
+      </p:sp>
+      <p:sp>
+        <p:nvSpPr>
+          <p:cNvPr id="5" name="타임라인 선"/>
           <p:cNvSpPr/>
           <p:nvPr/>
         </p:nvSpPr>
         <p:spPr>
           <a:xfrm>
-            <a:off x="10914538" y="631759"/>
-            <a:ext cx="185261" cy="185261"/>
-          </a:xfrm>
-          <a:prstGeom prst="ellipse">
-            <a:avLst/>
-          </a:prstGeom>
-          <a:solidFill>
-            <a:srgbClr val="995229"/>
-          </a:solidFill>
-          <a:ln>
-            <a:noFill/>
-          </a:ln>
-        </p:spPr>
-        <p:txBody>
-          <a:bodyPr rtlCol="0" anchor="ctr"/>
-          <a:lstStyle/>
-          <a:p>
-            <a:pPr algn="ctr"/>
-          </a:p>
-        </p:txBody>
-      </p:sp>
-      <p:sp>
-        <p:nvSpPr>
-          <p:cNvPr id="6" name="장식"/>
-          <p:cNvSpPr/>
-          <p:nvPr/>
-        </p:nvSpPr>
-        <p:spPr>
-          <a:xfrm>
-            <a:off x="11491036" y="1099893"/>
-            <a:ext cx="111201" cy="111201"/>
-          </a:xfrm>
-          <a:prstGeom prst="ellipse">
+            <a:off x="822960" y="3291840"/>
+            <a:ext cx="10545775" cy="54864"/>
+          </a:xfrm>
+          <a:prstGeom prst="rect">
             <a:avLst/>
           </a:prstGeom>
           <a:solidFill>
@@ -5289,335 +4618,7 @@
       </p:sp>
       <p:sp>
         <p:nvSpPr>
-          <p:cNvPr id="7" name="장식"/>
-          <p:cNvSpPr/>
-          <p:nvPr/>
-        </p:nvSpPr>
-        <p:spPr>
-          <a:xfrm>
-            <a:off x="10506607" y="843400"/>
-            <a:ext cx="146404" cy="146404"/>
-          </a:xfrm>
-          <a:prstGeom prst="ellipse">
-            <a:avLst/>
-          </a:prstGeom>
-          <a:solidFill>
-            <a:srgbClr val="3B9185"/>
-          </a:solidFill>
-          <a:ln>
-            <a:noFill/>
-          </a:ln>
-        </p:spPr>
-        <p:txBody>
-          <a:bodyPr rtlCol="0" anchor="ctr"/>
-          <a:lstStyle/>
-          <a:p>
-            <a:pPr algn="ctr"/>
-          </a:p>
-        </p:txBody>
-      </p:sp>
-      <p:sp>
-        <p:nvSpPr>
-          <p:cNvPr id="8" name="장식"/>
-          <p:cNvSpPr/>
-          <p:nvPr/>
-        </p:nvSpPr>
-        <p:spPr>
-          <a:xfrm>
-            <a:off x="11198146" y="619708"/>
-            <a:ext cx="120275" cy="120275"/>
-          </a:xfrm>
-          <a:prstGeom prst="ellipse">
-            <a:avLst/>
-          </a:prstGeom>
-          <a:solidFill>
-            <a:srgbClr val="995229"/>
-          </a:solidFill>
-          <a:ln>
-            <a:noFill/>
-          </a:ln>
-        </p:spPr>
-        <p:txBody>
-          <a:bodyPr rtlCol="0" anchor="ctr"/>
-          <a:lstStyle/>
-          <a:p>
-            <a:pPr algn="ctr"/>
-          </a:p>
-        </p:txBody>
-      </p:sp>
-      <p:sp>
-        <p:nvSpPr>
-          <p:cNvPr id="9" name="장식"/>
-          <p:cNvSpPr/>
-          <p:nvPr/>
-        </p:nvSpPr>
-        <p:spPr>
-          <a:xfrm>
-            <a:off x="11033527" y="398225"/>
-            <a:ext cx="186017" cy="186017"/>
-          </a:xfrm>
-          <a:prstGeom prst="ellipse">
-            <a:avLst/>
-          </a:prstGeom>
-          <a:solidFill>
-            <a:srgbClr val="F4DBCD"/>
-          </a:solidFill>
-          <a:ln>
-            <a:noFill/>
-          </a:ln>
-        </p:spPr>
-        <p:txBody>
-          <a:bodyPr rtlCol="0" anchor="ctr"/>
-          <a:lstStyle/>
-          <a:p>
-            <a:pPr algn="ctr"/>
-          </a:p>
-        </p:txBody>
-      </p:sp>
-      <p:sp>
-        <p:nvSpPr>
-          <p:cNvPr id="10" name="장식"/>
-          <p:cNvSpPr/>
-          <p:nvPr/>
-        </p:nvSpPr>
-        <p:spPr>
-          <a:xfrm>
-            <a:off x="10682891" y="656597"/>
-            <a:ext cx="79826" cy="79826"/>
-          </a:xfrm>
-          <a:prstGeom prst="ellipse">
-            <a:avLst/>
-          </a:prstGeom>
-          <a:solidFill>
-            <a:srgbClr val="3B9185"/>
-          </a:solidFill>
-          <a:ln>
-            <a:noFill/>
-          </a:ln>
-        </p:spPr>
-        <p:txBody>
-          <a:bodyPr rtlCol="0" anchor="ctr"/>
-          <a:lstStyle/>
-          <a:p>
-            <a:pPr algn="ctr"/>
-          </a:p>
-        </p:txBody>
-      </p:sp>
-      <p:sp>
-        <p:nvSpPr>
-          <p:cNvPr id="11" name="장식"/>
-          <p:cNvSpPr/>
-          <p:nvPr/>
-        </p:nvSpPr>
-        <p:spPr>
-          <a:xfrm>
-            <a:off x="11301345" y="1367190"/>
-            <a:ext cx="158557" cy="158557"/>
-          </a:xfrm>
-          <a:prstGeom prst="ellipse">
-            <a:avLst/>
-          </a:prstGeom>
-          <a:solidFill>
-            <a:srgbClr val="995229"/>
-          </a:solidFill>
-          <a:ln>
-            <a:noFill/>
-          </a:ln>
-        </p:spPr>
-        <p:txBody>
-          <a:bodyPr rtlCol="0" anchor="ctr"/>
-          <a:lstStyle/>
-          <a:p>
-            <a:pPr algn="ctr"/>
-          </a:p>
-        </p:txBody>
-      </p:sp>
-      <p:sp>
-        <p:nvSpPr>
-          <p:cNvPr id="12" name="장식"/>
-          <p:cNvSpPr/>
-          <p:nvPr/>
-        </p:nvSpPr>
-        <p:spPr>
-          <a:xfrm>
-            <a:off x="11059707" y="707976"/>
-            <a:ext cx="148776" cy="148776"/>
-          </a:xfrm>
-          <a:prstGeom prst="ellipse">
-            <a:avLst/>
-          </a:prstGeom>
-          <a:solidFill>
-            <a:srgbClr val="F4DBCD"/>
-          </a:solidFill>
-          <a:ln>
-            <a:noFill/>
-          </a:ln>
-        </p:spPr>
-        <p:txBody>
-          <a:bodyPr rtlCol="0" anchor="ctr"/>
-          <a:lstStyle/>
-          <a:p>
-            <a:pPr algn="ctr"/>
-          </a:p>
-        </p:txBody>
-      </p:sp>
-      <p:sp>
-        <p:nvSpPr>
-          <p:cNvPr id="13" name="장식"/>
-          <p:cNvSpPr/>
-          <p:nvPr/>
-        </p:nvSpPr>
-        <p:spPr>
-          <a:xfrm>
-            <a:off x="11352247" y="1000807"/>
-            <a:ext cx="157967" cy="157967"/>
-          </a:xfrm>
-          <a:prstGeom prst="ellipse">
-            <a:avLst/>
-          </a:prstGeom>
-          <a:solidFill>
-            <a:srgbClr val="3B9185"/>
-          </a:solidFill>
-          <a:ln>
-            <a:noFill/>
-          </a:ln>
-        </p:spPr>
-        <p:txBody>
-          <a:bodyPr rtlCol="0" anchor="ctr"/>
-          <a:lstStyle/>
-          <a:p>
-            <a:pPr algn="ctr"/>
-          </a:p>
-        </p:txBody>
-      </p:sp>
-      <p:sp>
-        <p:nvSpPr>
-          <p:cNvPr id="14" name="장식"/>
-          <p:cNvSpPr/>
-          <p:nvPr/>
-        </p:nvSpPr>
-        <p:spPr>
-          <a:xfrm>
-            <a:off x="10751978" y="615189"/>
-            <a:ext cx="100367" cy="100367"/>
-          </a:xfrm>
-          <a:prstGeom prst="ellipse">
-            <a:avLst/>
-          </a:prstGeom>
-          <a:solidFill>
-            <a:srgbClr val="995229"/>
-          </a:solidFill>
-          <a:ln>
-            <a:noFill/>
-          </a:ln>
-        </p:spPr>
-        <p:txBody>
-          <a:bodyPr rtlCol="0" anchor="ctr"/>
-          <a:lstStyle/>
-          <a:p>
-            <a:pPr algn="ctr"/>
-          </a:p>
-        </p:txBody>
-      </p:sp>
-      <p:sp>
-        <p:nvSpPr>
-          <p:cNvPr id="15" name="장식"/>
-          <p:cNvSpPr/>
-          <p:nvPr/>
-        </p:nvSpPr>
-        <p:spPr>
-          <a:xfrm>
-            <a:off x="10594948" y="721318"/>
-            <a:ext cx="69230" cy="69230"/>
-          </a:xfrm>
-          <a:prstGeom prst="ellipse">
-            <a:avLst/>
-          </a:prstGeom>
-          <a:solidFill>
-            <a:srgbClr val="F4DBCD"/>
-          </a:solidFill>
-          <a:ln>
-            <a:noFill/>
-          </a:ln>
-        </p:spPr>
-        <p:txBody>
-          <a:bodyPr rtlCol="0" anchor="ctr"/>
-          <a:lstStyle/>
-          <a:p>
-            <a:pPr algn="ctr"/>
-          </a:p>
-        </p:txBody>
-      </p:sp>
-      <p:sp>
-        <p:nvSpPr>
-          <p:cNvPr id="2" name="Title 1"/>
-          <p:cNvSpPr>
-            <a:spLocks noGrp="1"/>
-          </p:cNvSpPr>
-          <p:nvPr>
-            <p:ph type="title"/>
-          </p:nvPr>
-        </p:nvSpPr>
-        <p:spPr>
-          <a:xfrm>
-            <a:off x="822960" y="548640"/>
-            <a:ext cx="9265615" cy="822960"/>
-          </a:xfrm>
-        </p:spPr>
-        <p:txBody>
-          <a:bodyPr wrap="square" lIns="54864" rIns="54864" tIns="27432" bIns="27432" anchor="ctr">
-            <a:noAutofit/>
-          </a:bodyPr>
-          <a:lstStyle/>
-          <a:p>
-            <a:pPr algn="l">
-              <a:lnSpc>
-                <a:spcPct val="105000"/>
-              </a:lnSpc>
-            </a:pPr>
-            <a:r>
-              <a:rPr sz="3000" b="1" i="0">
-                <a:solidFill>
-                  <a:srgbClr val="492713"/>
-                </a:solidFill>
-              </a:rPr>
-              <a:t>우리 가족 이야기</a:t>
-            </a:r>
-          </a:p>
-        </p:txBody>
-      </p:sp>
-      <p:sp>
-        <p:nvSpPr>
-          <p:cNvPr id="16" name="타임라인 선"/>
-          <p:cNvSpPr/>
-          <p:nvPr/>
-        </p:nvSpPr>
-        <p:spPr>
-          <a:xfrm>
-            <a:off x="822960" y="3291840"/>
-            <a:ext cx="10545775" cy="54864"/>
-          </a:xfrm>
-          <a:prstGeom prst="rect">
-            <a:avLst/>
-          </a:prstGeom>
-          <a:solidFill>
-            <a:srgbClr val="F4DBCD"/>
-          </a:solidFill>
-          <a:ln>
-            <a:noFill/>
-          </a:ln>
-        </p:spPr>
-        <p:txBody>
-          <a:bodyPr rtlCol="0" anchor="ctr"/>
-          <a:lstStyle/>
-          <a:p>
-            <a:pPr algn="ctr"/>
-          </a:p>
-        </p:txBody>
-      </p:sp>
-      <p:sp>
-        <p:nvSpPr>
-          <p:cNvPr id="17" name="때 1"/>
+          <p:cNvPr id="6" name="때 1"/>
           <p:cNvSpPr/>
           <p:nvPr/>
         </p:nvSpPr>
@@ -5648,7 +4649,7 @@
       </p:sp>
       <p:sp>
         <p:nvSpPr>
-          <p:cNvPr id="18" name="TextBox 17"/>
+          <p:cNvPr id="7" name="TextBox 6"/>
           <p:cNvSpPr txBox="1"/>
           <p:nvPr/>
         </p:nvSpPr>
@@ -5686,7 +4687,7 @@
       </p:sp>
       <p:sp>
         <p:nvSpPr>
-          <p:cNvPr id="19" name="TextBox 18"/>
+          <p:cNvPr id="8" name="TextBox 7"/>
           <p:cNvSpPr txBox="1"/>
           <p:nvPr/>
         </p:nvSpPr>
@@ -5724,7 +4725,7 @@
       </p:sp>
       <p:sp>
         <p:nvSpPr>
-          <p:cNvPr id="20" name="TextBox 19"/>
+          <p:cNvPr id="9" name="TextBox 8"/>
           <p:cNvSpPr txBox="1"/>
           <p:nvPr/>
         </p:nvSpPr>
@@ -5762,7 +4763,7 @@
       </p:sp>
       <p:sp>
         <p:nvSpPr>
-          <p:cNvPr id="21" name="때 2"/>
+          <p:cNvPr id="10" name="때 2"/>
           <p:cNvSpPr/>
           <p:nvPr/>
         </p:nvSpPr>
@@ -5793,7 +4794,7 @@
       </p:sp>
       <p:sp>
         <p:nvSpPr>
-          <p:cNvPr id="22" name="TextBox 21"/>
+          <p:cNvPr id="11" name="TextBox 10"/>
           <p:cNvSpPr txBox="1"/>
           <p:nvPr/>
         </p:nvSpPr>
@@ -5831,7 +4832,7 @@
       </p:sp>
       <p:sp>
         <p:nvSpPr>
-          <p:cNvPr id="23" name="TextBox 22"/>
+          <p:cNvPr id="12" name="TextBox 11"/>
           <p:cNvSpPr txBox="1"/>
           <p:nvPr/>
         </p:nvSpPr>
@@ -5869,7 +4870,7 @@
       </p:sp>
       <p:sp>
         <p:nvSpPr>
-          <p:cNvPr id="24" name="TextBox 23"/>
+          <p:cNvPr id="13" name="TextBox 12"/>
           <p:cNvSpPr txBox="1"/>
           <p:nvPr/>
         </p:nvSpPr>
@@ -5907,7 +4908,7 @@
       </p:sp>
       <p:sp>
         <p:nvSpPr>
-          <p:cNvPr id="25" name="때 3"/>
+          <p:cNvPr id="14" name="때 3"/>
           <p:cNvSpPr/>
           <p:nvPr/>
         </p:nvSpPr>
@@ -5938,7 +4939,7 @@
       </p:sp>
       <p:sp>
         <p:nvSpPr>
-          <p:cNvPr id="26" name="TextBox 25"/>
+          <p:cNvPr id="15" name="TextBox 14"/>
           <p:cNvSpPr txBox="1"/>
           <p:nvPr/>
         </p:nvSpPr>
@@ -5976,7 +4977,7 @@
       </p:sp>
       <p:sp>
         <p:nvSpPr>
-          <p:cNvPr id="27" name="TextBox 26"/>
+          <p:cNvPr id="16" name="TextBox 15"/>
           <p:cNvSpPr txBox="1"/>
           <p:nvPr/>
         </p:nvSpPr>
@@ -6014,7 +5015,7 @@
       </p:sp>
       <p:sp>
         <p:nvSpPr>
-          <p:cNvPr id="28" name="TextBox 27"/>
+          <p:cNvPr id="17" name="TextBox 16"/>
           <p:cNvSpPr txBox="1"/>
           <p:nvPr/>
         </p:nvSpPr>
@@ -6052,7 +5053,7 @@
       </p:sp>
       <p:sp>
         <p:nvSpPr>
-          <p:cNvPr id="29" name="때 4"/>
+          <p:cNvPr id="18" name="때 4"/>
           <p:cNvSpPr/>
           <p:nvPr/>
         </p:nvSpPr>
@@ -6083,7 +5084,7 @@
       </p:sp>
       <p:sp>
         <p:nvSpPr>
-          <p:cNvPr id="30" name="TextBox 29"/>
+          <p:cNvPr id="19" name="TextBox 18"/>
           <p:cNvSpPr txBox="1"/>
           <p:nvPr/>
         </p:nvSpPr>
@@ -6121,7 +5122,7 @@
       </p:sp>
       <p:sp>
         <p:nvSpPr>
-          <p:cNvPr id="31" name="TextBox 30"/>
+          <p:cNvPr id="20" name="TextBox 19"/>
           <p:cNvSpPr txBox="1"/>
           <p:nvPr/>
         </p:nvSpPr>
@@ -6159,7 +5160,7 @@
       </p:sp>
       <p:sp>
         <p:nvSpPr>
-          <p:cNvPr id="32" name="TextBox 31"/>
+          <p:cNvPr id="21" name="TextBox 20"/>
           <p:cNvSpPr txBox="1"/>
           <p:nvPr/>
         </p:nvSpPr>
@@ -6281,325 +5282,6 @@
       </p:sp>
       <p:sp>
         <p:nvSpPr>
-          <p:cNvPr id="5" name="장식"/>
-          <p:cNvSpPr/>
-          <p:nvPr/>
-        </p:nvSpPr>
-        <p:spPr>
-          <a:xfrm>
-            <a:off x="10914538" y="631759"/>
-            <a:ext cx="185261" cy="185261"/>
-          </a:xfrm>
-          <a:prstGeom prst="ellipse">
-            <a:avLst/>
-          </a:prstGeom>
-          <a:solidFill>
-            <a:srgbClr val="995229"/>
-          </a:solidFill>
-          <a:ln>
-            <a:noFill/>
-          </a:ln>
-        </p:spPr>
-        <p:txBody>
-          <a:bodyPr rtlCol="0" anchor="ctr"/>
-          <a:lstStyle/>
-          <a:p>
-            <a:pPr algn="ctr"/>
-          </a:p>
-        </p:txBody>
-      </p:sp>
-      <p:sp>
-        <p:nvSpPr>
-          <p:cNvPr id="6" name="장식"/>
-          <p:cNvSpPr/>
-          <p:nvPr/>
-        </p:nvSpPr>
-        <p:spPr>
-          <a:xfrm>
-            <a:off x="11491036" y="1099893"/>
-            <a:ext cx="111201" cy="111201"/>
-          </a:xfrm>
-          <a:prstGeom prst="ellipse">
-            <a:avLst/>
-          </a:prstGeom>
-          <a:solidFill>
-            <a:srgbClr val="F4DBCD"/>
-          </a:solidFill>
-          <a:ln>
-            <a:noFill/>
-          </a:ln>
-        </p:spPr>
-        <p:txBody>
-          <a:bodyPr rtlCol="0" anchor="ctr"/>
-          <a:lstStyle/>
-          <a:p>
-            <a:pPr algn="ctr"/>
-          </a:p>
-        </p:txBody>
-      </p:sp>
-      <p:sp>
-        <p:nvSpPr>
-          <p:cNvPr id="7" name="장식"/>
-          <p:cNvSpPr/>
-          <p:nvPr/>
-        </p:nvSpPr>
-        <p:spPr>
-          <a:xfrm>
-            <a:off x="10506607" y="843400"/>
-            <a:ext cx="146404" cy="146404"/>
-          </a:xfrm>
-          <a:prstGeom prst="ellipse">
-            <a:avLst/>
-          </a:prstGeom>
-          <a:solidFill>
-            <a:srgbClr val="3B9185"/>
-          </a:solidFill>
-          <a:ln>
-            <a:noFill/>
-          </a:ln>
-        </p:spPr>
-        <p:txBody>
-          <a:bodyPr rtlCol="0" anchor="ctr"/>
-          <a:lstStyle/>
-          <a:p>
-            <a:pPr algn="ctr"/>
-          </a:p>
-        </p:txBody>
-      </p:sp>
-      <p:sp>
-        <p:nvSpPr>
-          <p:cNvPr id="8" name="장식"/>
-          <p:cNvSpPr/>
-          <p:nvPr/>
-        </p:nvSpPr>
-        <p:spPr>
-          <a:xfrm>
-            <a:off x="11198146" y="619708"/>
-            <a:ext cx="120275" cy="120275"/>
-          </a:xfrm>
-          <a:prstGeom prst="ellipse">
-            <a:avLst/>
-          </a:prstGeom>
-          <a:solidFill>
-            <a:srgbClr val="995229"/>
-          </a:solidFill>
-          <a:ln>
-            <a:noFill/>
-          </a:ln>
-        </p:spPr>
-        <p:txBody>
-          <a:bodyPr rtlCol="0" anchor="ctr"/>
-          <a:lstStyle/>
-          <a:p>
-            <a:pPr algn="ctr"/>
-          </a:p>
-        </p:txBody>
-      </p:sp>
-      <p:sp>
-        <p:nvSpPr>
-          <p:cNvPr id="9" name="장식"/>
-          <p:cNvSpPr/>
-          <p:nvPr/>
-        </p:nvSpPr>
-        <p:spPr>
-          <a:xfrm>
-            <a:off x="11033527" y="398225"/>
-            <a:ext cx="186017" cy="186017"/>
-          </a:xfrm>
-          <a:prstGeom prst="ellipse">
-            <a:avLst/>
-          </a:prstGeom>
-          <a:solidFill>
-            <a:srgbClr val="F4DBCD"/>
-          </a:solidFill>
-          <a:ln>
-            <a:noFill/>
-          </a:ln>
-        </p:spPr>
-        <p:txBody>
-          <a:bodyPr rtlCol="0" anchor="ctr"/>
-          <a:lstStyle/>
-          <a:p>
-            <a:pPr algn="ctr"/>
-          </a:p>
-        </p:txBody>
-      </p:sp>
-      <p:sp>
-        <p:nvSpPr>
-          <p:cNvPr id="10" name="장식"/>
-          <p:cNvSpPr/>
-          <p:nvPr/>
-        </p:nvSpPr>
-        <p:spPr>
-          <a:xfrm>
-            <a:off x="10682891" y="656597"/>
-            <a:ext cx="79826" cy="79826"/>
-          </a:xfrm>
-          <a:prstGeom prst="ellipse">
-            <a:avLst/>
-          </a:prstGeom>
-          <a:solidFill>
-            <a:srgbClr val="3B9185"/>
-          </a:solidFill>
-          <a:ln>
-            <a:noFill/>
-          </a:ln>
-        </p:spPr>
-        <p:txBody>
-          <a:bodyPr rtlCol="0" anchor="ctr"/>
-          <a:lstStyle/>
-          <a:p>
-            <a:pPr algn="ctr"/>
-          </a:p>
-        </p:txBody>
-      </p:sp>
-      <p:sp>
-        <p:nvSpPr>
-          <p:cNvPr id="11" name="장식"/>
-          <p:cNvSpPr/>
-          <p:nvPr/>
-        </p:nvSpPr>
-        <p:spPr>
-          <a:xfrm>
-            <a:off x="11301345" y="1367190"/>
-            <a:ext cx="158557" cy="158557"/>
-          </a:xfrm>
-          <a:prstGeom prst="ellipse">
-            <a:avLst/>
-          </a:prstGeom>
-          <a:solidFill>
-            <a:srgbClr val="995229"/>
-          </a:solidFill>
-          <a:ln>
-            <a:noFill/>
-          </a:ln>
-        </p:spPr>
-        <p:txBody>
-          <a:bodyPr rtlCol="0" anchor="ctr"/>
-          <a:lstStyle/>
-          <a:p>
-            <a:pPr algn="ctr"/>
-          </a:p>
-        </p:txBody>
-      </p:sp>
-      <p:sp>
-        <p:nvSpPr>
-          <p:cNvPr id="12" name="장식"/>
-          <p:cNvSpPr/>
-          <p:nvPr/>
-        </p:nvSpPr>
-        <p:spPr>
-          <a:xfrm>
-            <a:off x="11059707" y="707976"/>
-            <a:ext cx="148776" cy="148776"/>
-          </a:xfrm>
-          <a:prstGeom prst="ellipse">
-            <a:avLst/>
-          </a:prstGeom>
-          <a:solidFill>
-            <a:srgbClr val="F4DBCD"/>
-          </a:solidFill>
-          <a:ln>
-            <a:noFill/>
-          </a:ln>
-        </p:spPr>
-        <p:txBody>
-          <a:bodyPr rtlCol="0" anchor="ctr"/>
-          <a:lstStyle/>
-          <a:p>
-            <a:pPr algn="ctr"/>
-          </a:p>
-        </p:txBody>
-      </p:sp>
-      <p:sp>
-        <p:nvSpPr>
-          <p:cNvPr id="13" name="장식"/>
-          <p:cNvSpPr/>
-          <p:nvPr/>
-        </p:nvSpPr>
-        <p:spPr>
-          <a:xfrm>
-            <a:off x="11352247" y="1000807"/>
-            <a:ext cx="157967" cy="157967"/>
-          </a:xfrm>
-          <a:prstGeom prst="ellipse">
-            <a:avLst/>
-          </a:prstGeom>
-          <a:solidFill>
-            <a:srgbClr val="3B9185"/>
-          </a:solidFill>
-          <a:ln>
-            <a:noFill/>
-          </a:ln>
-        </p:spPr>
-        <p:txBody>
-          <a:bodyPr rtlCol="0" anchor="ctr"/>
-          <a:lstStyle/>
-          <a:p>
-            <a:pPr algn="ctr"/>
-          </a:p>
-        </p:txBody>
-      </p:sp>
-      <p:sp>
-        <p:nvSpPr>
-          <p:cNvPr id="14" name="장식"/>
-          <p:cNvSpPr/>
-          <p:nvPr/>
-        </p:nvSpPr>
-        <p:spPr>
-          <a:xfrm>
-            <a:off x="10751978" y="615189"/>
-            <a:ext cx="100367" cy="100367"/>
-          </a:xfrm>
-          <a:prstGeom prst="ellipse">
-            <a:avLst/>
-          </a:prstGeom>
-          <a:solidFill>
-            <a:srgbClr val="995229"/>
-          </a:solidFill>
-          <a:ln>
-            <a:noFill/>
-          </a:ln>
-        </p:spPr>
-        <p:txBody>
-          <a:bodyPr rtlCol="0" anchor="ctr"/>
-          <a:lstStyle/>
-          <a:p>
-            <a:pPr algn="ctr"/>
-          </a:p>
-        </p:txBody>
-      </p:sp>
-      <p:sp>
-        <p:nvSpPr>
-          <p:cNvPr id="15" name="장식"/>
-          <p:cNvSpPr/>
-          <p:nvPr/>
-        </p:nvSpPr>
-        <p:spPr>
-          <a:xfrm>
-            <a:off x="10594948" y="721318"/>
-            <a:ext cx="69230" cy="69230"/>
-          </a:xfrm>
-          <a:prstGeom prst="ellipse">
-            <a:avLst/>
-          </a:prstGeom>
-          <a:solidFill>
-            <a:srgbClr val="F4DBCD"/>
-          </a:solidFill>
-          <a:ln>
-            <a:noFill/>
-          </a:ln>
-        </p:spPr>
-        <p:txBody>
-          <a:bodyPr rtlCol="0" anchor="ctr"/>
-          <a:lstStyle/>
-          <a:p>
-            <a:pPr algn="ctr"/>
-          </a:p>
-        </p:txBody>
-      </p:sp>
-      <p:sp>
-        <p:nvSpPr>
           <p:cNvPr id="2" name="Title 1"/>
           <p:cNvSpPr>
             <a:spLocks noGrp="1"/>
@@ -6638,7 +5320,7 @@
       </p:sp>
       <p:sp>
         <p:nvSpPr>
-          <p:cNvPr id="16" name="줄 1"/>
+          <p:cNvPr id="5" name="줄 1"/>
           <p:cNvSpPr/>
           <p:nvPr/>
         </p:nvSpPr>
@@ -6671,7 +5353,7 @@
       </p:sp>
       <p:sp>
         <p:nvSpPr>
-          <p:cNvPr id="17" name="번호 1"/>
+          <p:cNvPr id="6" name="번호 1"/>
           <p:cNvSpPr/>
           <p:nvPr/>
         </p:nvSpPr>
@@ -6714,7 +5396,7 @@
       </p:sp>
       <p:sp>
         <p:nvSpPr>
-          <p:cNvPr id="18" name="TextBox 17"/>
+          <p:cNvPr id="7" name="TextBox 6"/>
           <p:cNvSpPr txBox="1"/>
           <p:nvPr/>
         </p:nvSpPr>
@@ -6752,7 +5434,7 @@
       </p:sp>
       <p:sp>
         <p:nvSpPr>
-          <p:cNvPr id="19" name="TextBox 18"/>
+          <p:cNvPr id="8" name="TextBox 7"/>
           <p:cNvSpPr txBox="1"/>
           <p:nvPr/>
         </p:nvSpPr>
@@ -6790,7 +5472,7 @@
       </p:sp>
       <p:sp>
         <p:nvSpPr>
-          <p:cNvPr id="20" name="줄 2"/>
+          <p:cNvPr id="9" name="줄 2"/>
           <p:cNvSpPr/>
           <p:nvPr/>
         </p:nvSpPr>
@@ -6823,7 +5505,7 @@
       </p:sp>
       <p:sp>
         <p:nvSpPr>
-          <p:cNvPr id="21" name="번호 2"/>
+          <p:cNvPr id="10" name="번호 2"/>
           <p:cNvSpPr/>
           <p:nvPr/>
         </p:nvSpPr>
@@ -6866,7 +5548,7 @@
       </p:sp>
       <p:sp>
         <p:nvSpPr>
-          <p:cNvPr id="22" name="TextBox 21"/>
+          <p:cNvPr id="11" name="TextBox 10"/>
           <p:cNvSpPr txBox="1"/>
           <p:nvPr/>
         </p:nvSpPr>
@@ -6904,7 +5586,7 @@
       </p:sp>
       <p:sp>
         <p:nvSpPr>
-          <p:cNvPr id="23" name="TextBox 22"/>
+          <p:cNvPr id="12" name="TextBox 11"/>
           <p:cNvSpPr txBox="1"/>
           <p:nvPr/>
         </p:nvSpPr>
@@ -6942,7 +5624,7 @@
       </p:sp>
       <p:sp>
         <p:nvSpPr>
-          <p:cNvPr id="24" name="줄 3"/>
+          <p:cNvPr id="13" name="줄 3"/>
           <p:cNvSpPr/>
           <p:nvPr/>
         </p:nvSpPr>
@@ -6975,7 +5657,7 @@
       </p:sp>
       <p:sp>
         <p:nvSpPr>
-          <p:cNvPr id="25" name="번호 3"/>
+          <p:cNvPr id="14" name="번호 3"/>
           <p:cNvSpPr/>
           <p:nvPr/>
         </p:nvSpPr>
@@ -7018,7 +5700,7 @@
       </p:sp>
       <p:sp>
         <p:nvSpPr>
-          <p:cNvPr id="26" name="TextBox 25"/>
+          <p:cNvPr id="15" name="TextBox 14"/>
           <p:cNvSpPr txBox="1"/>
           <p:nvPr/>
         </p:nvSpPr>
@@ -7056,7 +5738,7 @@
       </p:sp>
       <p:sp>
         <p:nvSpPr>
-          <p:cNvPr id="27" name="TextBox 26"/>
+          <p:cNvPr id="16" name="TextBox 15"/>
           <p:cNvSpPr txBox="1"/>
           <p:nvPr/>
         </p:nvSpPr>
@@ -7178,325 +5860,6 @@
       </p:sp>
       <p:sp>
         <p:nvSpPr>
-          <p:cNvPr id="5" name="장식"/>
-          <p:cNvSpPr/>
-          <p:nvPr/>
-        </p:nvSpPr>
-        <p:spPr>
-          <a:xfrm>
-            <a:off x="10914538" y="631759"/>
-            <a:ext cx="185261" cy="185261"/>
-          </a:xfrm>
-          <a:prstGeom prst="ellipse">
-            <a:avLst/>
-          </a:prstGeom>
-          <a:solidFill>
-            <a:srgbClr val="995229"/>
-          </a:solidFill>
-          <a:ln>
-            <a:noFill/>
-          </a:ln>
-        </p:spPr>
-        <p:txBody>
-          <a:bodyPr rtlCol="0" anchor="ctr"/>
-          <a:lstStyle/>
-          <a:p>
-            <a:pPr algn="ctr"/>
-          </a:p>
-        </p:txBody>
-      </p:sp>
-      <p:sp>
-        <p:nvSpPr>
-          <p:cNvPr id="6" name="장식"/>
-          <p:cNvSpPr/>
-          <p:nvPr/>
-        </p:nvSpPr>
-        <p:spPr>
-          <a:xfrm>
-            <a:off x="11491036" y="1099893"/>
-            <a:ext cx="111201" cy="111201"/>
-          </a:xfrm>
-          <a:prstGeom prst="ellipse">
-            <a:avLst/>
-          </a:prstGeom>
-          <a:solidFill>
-            <a:srgbClr val="F4DBCD"/>
-          </a:solidFill>
-          <a:ln>
-            <a:noFill/>
-          </a:ln>
-        </p:spPr>
-        <p:txBody>
-          <a:bodyPr rtlCol="0" anchor="ctr"/>
-          <a:lstStyle/>
-          <a:p>
-            <a:pPr algn="ctr"/>
-          </a:p>
-        </p:txBody>
-      </p:sp>
-      <p:sp>
-        <p:nvSpPr>
-          <p:cNvPr id="7" name="장식"/>
-          <p:cNvSpPr/>
-          <p:nvPr/>
-        </p:nvSpPr>
-        <p:spPr>
-          <a:xfrm>
-            <a:off x="10506607" y="843400"/>
-            <a:ext cx="146404" cy="146404"/>
-          </a:xfrm>
-          <a:prstGeom prst="ellipse">
-            <a:avLst/>
-          </a:prstGeom>
-          <a:solidFill>
-            <a:srgbClr val="3B9185"/>
-          </a:solidFill>
-          <a:ln>
-            <a:noFill/>
-          </a:ln>
-        </p:spPr>
-        <p:txBody>
-          <a:bodyPr rtlCol="0" anchor="ctr"/>
-          <a:lstStyle/>
-          <a:p>
-            <a:pPr algn="ctr"/>
-          </a:p>
-        </p:txBody>
-      </p:sp>
-      <p:sp>
-        <p:nvSpPr>
-          <p:cNvPr id="8" name="장식"/>
-          <p:cNvSpPr/>
-          <p:nvPr/>
-        </p:nvSpPr>
-        <p:spPr>
-          <a:xfrm>
-            <a:off x="11198146" y="619708"/>
-            <a:ext cx="120275" cy="120275"/>
-          </a:xfrm>
-          <a:prstGeom prst="ellipse">
-            <a:avLst/>
-          </a:prstGeom>
-          <a:solidFill>
-            <a:srgbClr val="995229"/>
-          </a:solidFill>
-          <a:ln>
-            <a:noFill/>
-          </a:ln>
-        </p:spPr>
-        <p:txBody>
-          <a:bodyPr rtlCol="0" anchor="ctr"/>
-          <a:lstStyle/>
-          <a:p>
-            <a:pPr algn="ctr"/>
-          </a:p>
-        </p:txBody>
-      </p:sp>
-      <p:sp>
-        <p:nvSpPr>
-          <p:cNvPr id="9" name="장식"/>
-          <p:cNvSpPr/>
-          <p:nvPr/>
-        </p:nvSpPr>
-        <p:spPr>
-          <a:xfrm>
-            <a:off x="11033527" y="398225"/>
-            <a:ext cx="186017" cy="186017"/>
-          </a:xfrm>
-          <a:prstGeom prst="ellipse">
-            <a:avLst/>
-          </a:prstGeom>
-          <a:solidFill>
-            <a:srgbClr val="F4DBCD"/>
-          </a:solidFill>
-          <a:ln>
-            <a:noFill/>
-          </a:ln>
-        </p:spPr>
-        <p:txBody>
-          <a:bodyPr rtlCol="0" anchor="ctr"/>
-          <a:lstStyle/>
-          <a:p>
-            <a:pPr algn="ctr"/>
-          </a:p>
-        </p:txBody>
-      </p:sp>
-      <p:sp>
-        <p:nvSpPr>
-          <p:cNvPr id="10" name="장식"/>
-          <p:cNvSpPr/>
-          <p:nvPr/>
-        </p:nvSpPr>
-        <p:spPr>
-          <a:xfrm>
-            <a:off x="10682891" y="656597"/>
-            <a:ext cx="79826" cy="79826"/>
-          </a:xfrm>
-          <a:prstGeom prst="ellipse">
-            <a:avLst/>
-          </a:prstGeom>
-          <a:solidFill>
-            <a:srgbClr val="3B9185"/>
-          </a:solidFill>
-          <a:ln>
-            <a:noFill/>
-          </a:ln>
-        </p:spPr>
-        <p:txBody>
-          <a:bodyPr rtlCol="0" anchor="ctr"/>
-          <a:lstStyle/>
-          <a:p>
-            <a:pPr algn="ctr"/>
-          </a:p>
-        </p:txBody>
-      </p:sp>
-      <p:sp>
-        <p:nvSpPr>
-          <p:cNvPr id="11" name="장식"/>
-          <p:cNvSpPr/>
-          <p:nvPr/>
-        </p:nvSpPr>
-        <p:spPr>
-          <a:xfrm>
-            <a:off x="11301345" y="1367190"/>
-            <a:ext cx="158557" cy="158557"/>
-          </a:xfrm>
-          <a:prstGeom prst="ellipse">
-            <a:avLst/>
-          </a:prstGeom>
-          <a:solidFill>
-            <a:srgbClr val="995229"/>
-          </a:solidFill>
-          <a:ln>
-            <a:noFill/>
-          </a:ln>
-        </p:spPr>
-        <p:txBody>
-          <a:bodyPr rtlCol="0" anchor="ctr"/>
-          <a:lstStyle/>
-          <a:p>
-            <a:pPr algn="ctr"/>
-          </a:p>
-        </p:txBody>
-      </p:sp>
-      <p:sp>
-        <p:nvSpPr>
-          <p:cNvPr id="12" name="장식"/>
-          <p:cNvSpPr/>
-          <p:nvPr/>
-        </p:nvSpPr>
-        <p:spPr>
-          <a:xfrm>
-            <a:off x="11059707" y="707976"/>
-            <a:ext cx="148776" cy="148776"/>
-          </a:xfrm>
-          <a:prstGeom prst="ellipse">
-            <a:avLst/>
-          </a:prstGeom>
-          <a:solidFill>
-            <a:srgbClr val="F4DBCD"/>
-          </a:solidFill>
-          <a:ln>
-            <a:noFill/>
-          </a:ln>
-        </p:spPr>
-        <p:txBody>
-          <a:bodyPr rtlCol="0" anchor="ctr"/>
-          <a:lstStyle/>
-          <a:p>
-            <a:pPr algn="ctr"/>
-          </a:p>
-        </p:txBody>
-      </p:sp>
-      <p:sp>
-        <p:nvSpPr>
-          <p:cNvPr id="13" name="장식"/>
-          <p:cNvSpPr/>
-          <p:nvPr/>
-        </p:nvSpPr>
-        <p:spPr>
-          <a:xfrm>
-            <a:off x="11352247" y="1000807"/>
-            <a:ext cx="157967" cy="157967"/>
-          </a:xfrm>
-          <a:prstGeom prst="ellipse">
-            <a:avLst/>
-          </a:prstGeom>
-          <a:solidFill>
-            <a:srgbClr val="3B9185"/>
-          </a:solidFill>
-          <a:ln>
-            <a:noFill/>
-          </a:ln>
-        </p:spPr>
-        <p:txBody>
-          <a:bodyPr rtlCol="0" anchor="ctr"/>
-          <a:lstStyle/>
-          <a:p>
-            <a:pPr algn="ctr"/>
-          </a:p>
-        </p:txBody>
-      </p:sp>
-      <p:sp>
-        <p:nvSpPr>
-          <p:cNvPr id="14" name="장식"/>
-          <p:cNvSpPr/>
-          <p:nvPr/>
-        </p:nvSpPr>
-        <p:spPr>
-          <a:xfrm>
-            <a:off x="10751978" y="615189"/>
-            <a:ext cx="100367" cy="100367"/>
-          </a:xfrm>
-          <a:prstGeom prst="ellipse">
-            <a:avLst/>
-          </a:prstGeom>
-          <a:solidFill>
-            <a:srgbClr val="995229"/>
-          </a:solidFill>
-          <a:ln>
-            <a:noFill/>
-          </a:ln>
-        </p:spPr>
-        <p:txBody>
-          <a:bodyPr rtlCol="0" anchor="ctr"/>
-          <a:lstStyle/>
-          <a:p>
-            <a:pPr algn="ctr"/>
-          </a:p>
-        </p:txBody>
-      </p:sp>
-      <p:sp>
-        <p:nvSpPr>
-          <p:cNvPr id="15" name="장식"/>
-          <p:cNvSpPr/>
-          <p:nvPr/>
-        </p:nvSpPr>
-        <p:spPr>
-          <a:xfrm>
-            <a:off x="10594948" y="721318"/>
-            <a:ext cx="69230" cy="69230"/>
-          </a:xfrm>
-          <a:prstGeom prst="ellipse">
-            <a:avLst/>
-          </a:prstGeom>
-          <a:solidFill>
-            <a:srgbClr val="F4DBCD"/>
-          </a:solidFill>
-          <a:ln>
-            <a:noFill/>
-          </a:ln>
-        </p:spPr>
-        <p:txBody>
-          <a:bodyPr rtlCol="0" anchor="ctr"/>
-          <a:lstStyle/>
-          <a:p>
-            <a:pPr algn="ctr"/>
-          </a:p>
-        </p:txBody>
-      </p:sp>
-      <p:sp>
-        <p:nvSpPr>
           <p:cNvPr id="2" name="Title 1"/>
           <p:cNvSpPr>
             <a:spLocks noGrp="1"/>
@@ -7535,7 +5898,7 @@
       </p:sp>
       <p:sp>
         <p:nvSpPr>
-          <p:cNvPr id="16" name="사진 자리"/>
+          <p:cNvPr id="5" name="사진 자리"/>
           <p:cNvSpPr/>
           <p:nvPr/>
         </p:nvSpPr>
@@ -7583,7 +5946,7 @@
       </p:sp>
       <p:sp>
         <p:nvSpPr>
-          <p:cNvPr id="17" name="사진 자리"/>
+          <p:cNvPr id="6" name="사진 자리"/>
           <p:cNvSpPr/>
           <p:nvPr/>
         </p:nvSpPr>
@@ -7631,7 +5994,7 @@
       </p:sp>
       <p:sp>
         <p:nvSpPr>
-          <p:cNvPr id="18" name="사진 자리"/>
+          <p:cNvPr id="7" name="사진 자리"/>
           <p:cNvSpPr/>
           <p:nvPr/>
         </p:nvSpPr>
@@ -7679,7 +6042,7 @@
       </p:sp>
       <p:sp>
         <p:nvSpPr>
-          <p:cNvPr id="19" name="사진 자리"/>
+          <p:cNvPr id="8" name="사진 자리"/>
           <p:cNvSpPr/>
           <p:nvPr/>
         </p:nvSpPr>
@@ -7727,7 +6090,7 @@
       </p:sp>
       <p:sp>
         <p:nvSpPr>
-          <p:cNvPr id="20" name="사진 자리"/>
+          <p:cNvPr id="9" name="사진 자리"/>
           <p:cNvSpPr/>
           <p:nvPr/>
         </p:nvSpPr>
@@ -7775,7 +6138,7 @@
       </p:sp>
       <p:sp>
         <p:nvSpPr>
-          <p:cNvPr id="21" name="사진 자리"/>
+          <p:cNvPr id="10" name="사진 자리"/>
           <p:cNvSpPr/>
           <p:nvPr/>
         </p:nvSpPr>
@@ -7832,14 +6195,6 @@
 <file path=ppt/slides/slide6.xml><?xml version="1.0" encoding="utf-8"?>
 <p:sld xmlns:a="http://schemas.openxmlformats.org/drawingml/2006/main" xmlns:p="http://schemas.openxmlformats.org/presentationml/2006/main" xmlns:r="http://schemas.openxmlformats.org/officeDocument/2006/relationships">
   <p:cSld>
-    <p:bg>
-      <p:bgPr>
-        <a:solidFill>
-          <a:srgbClr val="FBF3EF"/>
-        </a:solidFill>
-        <a:effectLst/>
-      </p:bgPr>
-    </p:bg>
     <p:spTree>
       <p:nvGrpSpPr>
         <p:cNvPr id="1" name=""/>
@@ -7847,383 +6202,30 @@
         <p:nvPr/>
       </p:nvGrpSpPr>
       <p:grpSpPr/>
-      <p:sp>
-        <p:nvSpPr>
-          <p:cNvPr id="3" name="장식"/>
-          <p:cNvSpPr/>
+      <p:pic>
+        <p:nvPicPr>
+          <p:cNvPr id="3" name="표지 그림" descr="family-38.jpg"/>
+          <p:cNvPicPr>
+            <a:picLocks noChangeAspect="1"/>
+          </p:cNvPicPr>
           <p:nvPr/>
-        </p:nvSpPr>
-        <p:spPr>
-          <a:xfrm>
-            <a:off x="274320" y="274320"/>
-            <a:ext cx="11643055" cy="6309360"/>
+        </p:nvPicPr>
+        <p:blipFill>
+          <a:blip r:embed="rId2"/>
+          <a:stretch>
+            <a:fillRect/>
+          </a:stretch>
+        </p:blipFill>
+        <p:spPr>
+          <a:xfrm>
+            <a:off x="0" y="0"/>
+            <a:ext cx="12191695" cy="6858000"/>
           </a:xfrm>
           <a:prstGeom prst="rect">
             <a:avLst/>
           </a:prstGeom>
-          <a:noFill/>
-          <a:ln w="38100">
-            <a:solidFill>
-              <a:srgbClr val="995229"/>
-            </a:solidFill>
-          </a:ln>
-        </p:spPr>
-        <p:txBody>
-          <a:bodyPr rtlCol="0" anchor="ctr"/>
-          <a:lstStyle/>
-          <a:p>
-            <a:pPr algn="ctr"/>
-          </a:p>
-        </p:txBody>
-      </p:sp>
-      <p:sp>
-        <p:nvSpPr>
-          <p:cNvPr id="4" name="장식"/>
-          <p:cNvSpPr/>
-          <p:nvPr/>
-        </p:nvSpPr>
-        <p:spPr>
-          <a:xfrm>
-            <a:off x="457200" y="457200"/>
-            <a:ext cx="11277295" cy="5943600"/>
-          </a:xfrm>
-          <a:prstGeom prst="rect">
-            <a:avLst/>
-          </a:prstGeom>
-          <a:noFill/>
-          <a:ln w="12700">
-            <a:solidFill>
-              <a:srgbClr val="F4DBCD"/>
-            </a:solidFill>
-          </a:ln>
-        </p:spPr>
-        <p:txBody>
-          <a:bodyPr rtlCol="0" anchor="ctr"/>
-          <a:lstStyle/>
-          <a:p>
-            <a:pPr algn="ctr"/>
-          </a:p>
-        </p:txBody>
-      </p:sp>
-      <p:sp>
-        <p:nvSpPr>
-          <p:cNvPr id="5" name="장식"/>
-          <p:cNvSpPr/>
-          <p:nvPr/>
-        </p:nvSpPr>
-        <p:spPr>
-          <a:xfrm>
-            <a:off x="5854364" y="780551"/>
-            <a:ext cx="333470" cy="333470"/>
-          </a:xfrm>
-          <a:prstGeom prst="ellipse">
-            <a:avLst/>
-          </a:prstGeom>
-          <a:solidFill>
-            <a:srgbClr val="995229"/>
-          </a:solidFill>
-          <a:ln>
-            <a:noFill/>
-          </a:ln>
-        </p:spPr>
-        <p:txBody>
-          <a:bodyPr rtlCol="0" anchor="ctr"/>
-          <a:lstStyle/>
-          <a:p>
-            <a:pPr algn="ctr"/>
-          </a:p>
-        </p:txBody>
-      </p:sp>
-      <p:sp>
-        <p:nvSpPr>
-          <p:cNvPr id="6" name="장식"/>
-          <p:cNvSpPr/>
-          <p:nvPr/>
-        </p:nvSpPr>
-        <p:spPr>
-          <a:xfrm>
-            <a:off x="6892061" y="1623191"/>
-            <a:ext cx="200163" cy="200163"/>
-          </a:xfrm>
-          <a:prstGeom prst="ellipse">
-            <a:avLst/>
-          </a:prstGeom>
-          <a:solidFill>
-            <a:srgbClr val="F4DBCD"/>
-          </a:solidFill>
-          <a:ln>
-            <a:noFill/>
-          </a:ln>
-        </p:spPr>
-        <p:txBody>
-          <a:bodyPr rtlCol="0" anchor="ctr"/>
-          <a:lstStyle/>
-          <a:p>
-            <a:pPr algn="ctr"/>
-          </a:p>
-        </p:txBody>
-      </p:sp>
-      <p:sp>
-        <p:nvSpPr>
-          <p:cNvPr id="7" name="장식"/>
-          <p:cNvSpPr/>
-          <p:nvPr/>
-        </p:nvSpPr>
-        <p:spPr>
-          <a:xfrm>
-            <a:off x="5120089" y="1161505"/>
-            <a:ext cx="263527" cy="263527"/>
-          </a:xfrm>
-          <a:prstGeom prst="ellipse">
-            <a:avLst/>
-          </a:prstGeom>
-          <a:solidFill>
-            <a:srgbClr val="3B9185"/>
-          </a:solidFill>
-          <a:ln>
-            <a:noFill/>
-          </a:ln>
-        </p:spPr>
-        <p:txBody>
-          <a:bodyPr rtlCol="0" anchor="ctr"/>
-          <a:lstStyle/>
-          <a:p>
-            <a:pPr algn="ctr"/>
-          </a:p>
-        </p:txBody>
-      </p:sp>
-      <p:sp>
-        <p:nvSpPr>
-          <p:cNvPr id="8" name="장식"/>
-          <p:cNvSpPr/>
-          <p:nvPr/>
-        </p:nvSpPr>
-        <p:spPr>
-          <a:xfrm>
-            <a:off x="6364859" y="758859"/>
-            <a:ext cx="216496" cy="216496"/>
-          </a:xfrm>
-          <a:prstGeom prst="ellipse">
-            <a:avLst/>
-          </a:prstGeom>
-          <a:solidFill>
-            <a:srgbClr val="995229"/>
-          </a:solidFill>
-          <a:ln>
-            <a:noFill/>
-          </a:ln>
-        </p:spPr>
-        <p:txBody>
-          <a:bodyPr rtlCol="0" anchor="ctr"/>
-          <a:lstStyle/>
-          <a:p>
-            <a:pPr algn="ctr"/>
-          </a:p>
-        </p:txBody>
-      </p:sp>
-      <p:sp>
-        <p:nvSpPr>
-          <p:cNvPr id="9" name="장식"/>
-          <p:cNvSpPr/>
-          <p:nvPr/>
-        </p:nvSpPr>
-        <p:spPr>
-          <a:xfrm>
-            <a:off x="6068545" y="360190"/>
-            <a:ext cx="334832" cy="334832"/>
-          </a:xfrm>
-          <a:prstGeom prst="ellipse">
-            <a:avLst/>
-          </a:prstGeom>
-          <a:solidFill>
-            <a:srgbClr val="F4DBCD"/>
-          </a:solidFill>
-          <a:ln>
-            <a:noFill/>
-          </a:ln>
-        </p:spPr>
-        <p:txBody>
-          <a:bodyPr rtlCol="0" anchor="ctr"/>
-          <a:lstStyle/>
-          <a:p>
-            <a:pPr algn="ctr"/>
-          </a:p>
-        </p:txBody>
-      </p:sp>
-      <p:sp>
-        <p:nvSpPr>
-          <p:cNvPr id="10" name="장식"/>
-          <p:cNvSpPr/>
-          <p:nvPr/>
-        </p:nvSpPr>
-        <p:spPr>
-          <a:xfrm>
-            <a:off x="5437401" y="825259"/>
-            <a:ext cx="143688" cy="143688"/>
-          </a:xfrm>
-          <a:prstGeom prst="ellipse">
-            <a:avLst/>
-          </a:prstGeom>
-          <a:solidFill>
-            <a:srgbClr val="3B9185"/>
-          </a:solidFill>
-          <a:ln>
-            <a:noFill/>
-          </a:ln>
-        </p:spPr>
-        <p:txBody>
-          <a:bodyPr rtlCol="0" anchor="ctr"/>
-          <a:lstStyle/>
-          <a:p>
-            <a:pPr algn="ctr"/>
-          </a:p>
-        </p:txBody>
-      </p:sp>
-      <p:sp>
-        <p:nvSpPr>
-          <p:cNvPr id="11" name="장식"/>
-          <p:cNvSpPr/>
-          <p:nvPr/>
-        </p:nvSpPr>
-        <p:spPr>
-          <a:xfrm>
-            <a:off x="6550618" y="2104327"/>
-            <a:ext cx="285402" cy="285402"/>
-          </a:xfrm>
-          <a:prstGeom prst="ellipse">
-            <a:avLst/>
-          </a:prstGeom>
-          <a:solidFill>
-            <a:srgbClr val="995229"/>
-          </a:solidFill>
-          <a:ln>
-            <a:noFill/>
-          </a:ln>
-        </p:spPr>
-        <p:txBody>
-          <a:bodyPr rtlCol="0" anchor="ctr"/>
-          <a:lstStyle/>
-          <a:p>
-            <a:pPr algn="ctr"/>
-          </a:p>
-        </p:txBody>
-      </p:sp>
-      <p:sp>
-        <p:nvSpPr>
-          <p:cNvPr id="12" name="장식"/>
-          <p:cNvSpPr/>
-          <p:nvPr/>
-        </p:nvSpPr>
-        <p:spPr>
-          <a:xfrm>
-            <a:off x="6115670" y="917740"/>
-            <a:ext cx="267797" cy="267797"/>
-          </a:xfrm>
-          <a:prstGeom prst="ellipse">
-            <a:avLst/>
-          </a:prstGeom>
-          <a:solidFill>
-            <a:srgbClr val="F4DBCD"/>
-          </a:solidFill>
-          <a:ln>
-            <a:noFill/>
-          </a:ln>
-        </p:spPr>
-        <p:txBody>
-          <a:bodyPr rtlCol="0" anchor="ctr"/>
-          <a:lstStyle/>
-          <a:p>
-            <a:pPr algn="ctr"/>
-          </a:p>
-        </p:txBody>
-      </p:sp>
-      <p:sp>
-        <p:nvSpPr>
-          <p:cNvPr id="13" name="장식"/>
-          <p:cNvSpPr/>
-          <p:nvPr/>
-        </p:nvSpPr>
-        <p:spPr>
-          <a:xfrm>
-            <a:off x="6642241" y="1444838"/>
-            <a:ext cx="284342" cy="284342"/>
-          </a:xfrm>
-          <a:prstGeom prst="ellipse">
-            <a:avLst/>
-          </a:prstGeom>
-          <a:solidFill>
-            <a:srgbClr val="3B9185"/>
-          </a:solidFill>
-          <a:ln>
-            <a:noFill/>
-          </a:ln>
-        </p:spPr>
-        <p:txBody>
-          <a:bodyPr rtlCol="0" anchor="ctr"/>
-          <a:lstStyle/>
-          <a:p>
-            <a:pPr algn="ctr"/>
-          </a:p>
-        </p:txBody>
-      </p:sp>
-      <p:sp>
-        <p:nvSpPr>
-          <p:cNvPr id="14" name="장식"/>
-          <p:cNvSpPr/>
-          <p:nvPr/>
-        </p:nvSpPr>
-        <p:spPr>
-          <a:xfrm>
-            <a:off x="5561757" y="750724"/>
-            <a:ext cx="180660" cy="180660"/>
-          </a:xfrm>
-          <a:prstGeom prst="ellipse">
-            <a:avLst/>
-          </a:prstGeom>
-          <a:solidFill>
-            <a:srgbClr val="995229"/>
-          </a:solidFill>
-          <a:ln>
-            <a:noFill/>
-          </a:ln>
-        </p:spPr>
-        <p:txBody>
-          <a:bodyPr rtlCol="0" anchor="ctr"/>
-          <a:lstStyle/>
-          <a:p>
-            <a:pPr algn="ctr"/>
-          </a:p>
-        </p:txBody>
-      </p:sp>
-      <p:sp>
-        <p:nvSpPr>
-          <p:cNvPr id="15" name="장식"/>
-          <p:cNvSpPr/>
-          <p:nvPr/>
-        </p:nvSpPr>
-        <p:spPr>
-          <a:xfrm>
-            <a:off x="5279103" y="941758"/>
-            <a:ext cx="124614" cy="124614"/>
-          </a:xfrm>
-          <a:prstGeom prst="ellipse">
-            <a:avLst/>
-          </a:prstGeom>
-          <a:solidFill>
-            <a:srgbClr val="F4DBCD"/>
-          </a:solidFill>
-          <a:ln>
-            <a:noFill/>
-          </a:ln>
-        </p:spPr>
-        <p:txBody>
-          <a:bodyPr rtlCol="0" anchor="ctr"/>
-          <a:lstStyle/>
-          <a:p>
-            <a:pPr algn="ctr"/>
-          </a:p>
-        </p:txBody>
-      </p:sp>
+        </p:spPr>
+      </p:pic>
       <p:sp>
         <p:nvSpPr>
           <p:cNvPr id="2" name="Title 1"/>
@@ -8236,8 +6238,8 @@
         </p:nvSpPr>
         <p:spPr>
           <a:xfrm>
-            <a:off x="1463003" y="2331720"/>
-            <a:ext cx="9265688" cy="1371600"/>
+            <a:off x="853418" y="2057400"/>
+            <a:ext cx="6095847" cy="1554480"/>
           </a:xfrm>
         </p:spPr>
         <p:txBody>
@@ -8246,7 +6248,7 @@
           </a:bodyPr>
           <a:lstStyle/>
           <a:p>
-            <a:pPr algn="ctr">
+            <a:pPr algn="l">
               <a:lnSpc>
                 <a:spcPct val="105000"/>
               </a:lnSpc>
@@ -8257,21 +6259,21 @@
                   <a:srgbClr val="492713"/>
                 </a:solidFill>
               </a:rPr>
-              <a:t>우리 가족을 소개했어요</a:t>
-            </a:r>
-          </a:p>
-        </p:txBody>
-      </p:sp>
-      <p:sp>
-        <p:nvSpPr>
-          <p:cNvPr id="16" name="한 줄 문구"/>
+              <a:t>우리 가족 소개를 마칩니다</a:t>
+            </a:r>
+          </a:p>
+        </p:txBody>
+      </p:sp>
+      <p:sp>
+        <p:nvSpPr>
+          <p:cNvPr id="4" name="한 줄 문구"/>
           <p:cNvSpPr txBox="1"/>
           <p:nvPr/>
         </p:nvSpPr>
         <p:spPr>
           <a:xfrm>
-            <a:off x="1463003" y="3794760"/>
-            <a:ext cx="9265688" cy="822960"/>
+            <a:off x="853418" y="3749039"/>
+            <a:ext cx="6095847" cy="822960"/>
           </a:xfrm>
           <a:prstGeom prst="rect">
             <a:avLst/>
@@ -8284,7 +6286,7 @@
           </a:bodyPr>
           <a:lstStyle/>
           <a:p>
-            <a:pPr algn="ctr">
+            <a:pPr algn="l">
               <a:lnSpc>
                 <a:spcPct val="115000"/>
               </a:lnSpc>
@@ -8295,21 +6297,21 @@
                   <a:srgbClr val="492713"/>
                 </a:solidFill>
               </a:rPr>
-              <a:t>함께여서 늘 든든합니다</a:t>
-            </a:r>
-          </a:p>
-        </p:txBody>
-      </p:sp>
-      <p:sp>
-        <p:nvSpPr>
-          <p:cNvPr id="17" name="안내 문구"/>
+              <a:t>읽어 주셔서 고맙습니다</a:t>
+            </a:r>
+          </a:p>
+        </p:txBody>
+      </p:sp>
+      <p:sp>
+        <p:nvSpPr>
+          <p:cNvPr id="5" name="안내 문구"/>
           <p:cNvSpPr txBox="1"/>
           <p:nvPr/>
         </p:nvSpPr>
         <p:spPr>
           <a:xfrm>
-            <a:off x="1463003" y="4663440"/>
-            <a:ext cx="9265688" cy="914400"/>
+            <a:off x="853418" y="4617720"/>
+            <a:ext cx="6095847" cy="914400"/>
           </a:xfrm>
           <a:prstGeom prst="rect">
             <a:avLst/>
@@ -8322,7 +6324,7 @@
           </a:bodyPr>
           <a:lstStyle/>
           <a:p>
-            <a:pPr algn="ctr">
+            <a:pPr algn="l">
               <a:lnSpc>
                 <a:spcPct val="115000"/>
               </a:lnSpc>

--- a/public/fun/pack/pptx/family/가족소개_38_3대가족_군고구마골목.pptx
+++ b/public/fun/pack/pptx/family/가족소개_38_3대가족_군고구마골목.pptx
@@ -3286,6 +3286,14 @@
 <file path=ppt/slides/slide1.xml><?xml version="1.0" encoding="utf-8"?>
 <p:sld xmlns:a="http://schemas.openxmlformats.org/drawingml/2006/main" xmlns:p="http://schemas.openxmlformats.org/presentationml/2006/main" xmlns:r="http://schemas.openxmlformats.org/officeDocument/2006/relationships">
   <p:cSld>
+    <p:bg>
+      <p:bgPr>
+        <a:solidFill>
+          <a:srgbClr val="F6E1D5"/>
+        </a:solidFill>
+        <a:effectLst/>
+      </p:bgPr>
+    </p:bg>
     <p:spTree>
       <p:nvGrpSpPr>
         <p:cNvPr id="1" name=""/>
@@ -3293,30 +3301,116 @@
         <p:nvPr/>
       </p:nvGrpSpPr>
       <p:grpSpPr/>
-      <p:pic>
-        <p:nvPicPr>
-          <p:cNvPr id="3" name="표지 그림" descr="family-38.jpg"/>
-          <p:cNvPicPr>
-            <a:picLocks noChangeAspect="1"/>
-          </p:cNvPicPr>
-          <p:nvPr/>
-        </p:nvPicPr>
-        <p:blipFill>
-          <a:blip r:embed="rId2"/>
-          <a:stretch>
-            <a:fillRect/>
-          </a:stretch>
-        </p:blipFill>
-        <p:spPr>
-          <a:xfrm>
-            <a:off x="0" y="0"/>
-            <a:ext cx="12191695" cy="6858000"/>
+      <p:sp>
+        <p:nvSpPr>
+          <p:cNvPr id="3" name="사진 자리"/>
+          <p:cNvSpPr/>
+          <p:nvPr/>
+        </p:nvSpPr>
+        <p:spPr>
+          <a:xfrm>
+            <a:off x="7802684" y="0"/>
+            <a:ext cx="4389010" cy="6858000"/>
           </a:xfrm>
           <a:prstGeom prst="rect">
             <a:avLst/>
           </a:prstGeom>
-        </p:spPr>
-      </p:pic>
+          <a:solidFill>
+            <a:srgbClr val="EBC4AD"/>
+          </a:solidFill>
+          <a:ln>
+            <a:noFill/>
+          </a:ln>
+        </p:spPr>
+        <p:txBody>
+          <a:bodyPr rtlCol="0" anchor="ctr" wrap="square" lIns="54864" rIns="54864" tIns="27432" bIns="27432">
+            <a:noAutofit/>
+          </a:bodyPr>
+          <a:lstStyle/>
+          <a:p>
+            <a:pPr algn="ctr">
+              <a:lnSpc>
+                <a:spcPct val="100000"/>
+              </a:lnSpc>
+            </a:pPr>
+            <a:r>
+              <a:rPr sz="1400" b="0" i="0">
+                <a:solidFill>
+                  <a:srgbClr val="493427"/>
+                </a:solidFill>
+              </a:rPr>
+              <a:t>사진을 넣어 주세요</a:t>
+            </a:r>
+          </a:p>
+        </p:txBody>
+      </p:sp>
+      <p:sp>
+        <p:nvSpPr>
+          <p:cNvPr id="4" name="장식"/>
+          <p:cNvSpPr/>
+          <p:nvPr/>
+        </p:nvSpPr>
+        <p:spPr>
+          <a:xfrm>
+            <a:off x="8168435" y="365760"/>
+            <a:ext cx="3657508" cy="6126480"/>
+          </a:xfrm>
+          <a:prstGeom prst="rect">
+            <a:avLst/>
+          </a:prstGeom>
+          <a:noFill/>
+          <a:ln w="9525">
+            <a:solidFill>
+              <a:srgbClr val="26231F"/>
+            </a:solidFill>
+          </a:ln>
+        </p:spPr>
+        <p:txBody>
+          <a:bodyPr rtlCol="0" anchor="ctr"/>
+          <a:lstStyle/>
+          <a:p>
+            <a:pPr algn="ctr"/>
+          </a:p>
+        </p:txBody>
+      </p:sp>
+      <p:sp>
+        <p:nvSpPr>
+          <p:cNvPr id="5" name="라벨"/>
+          <p:cNvSpPr txBox="1"/>
+          <p:nvPr/>
+        </p:nvSpPr>
+        <p:spPr>
+          <a:xfrm>
+            <a:off x="822960" y="2148840"/>
+            <a:ext cx="5608179" cy="274320"/>
+          </a:xfrm>
+          <a:prstGeom prst="rect">
+            <a:avLst/>
+          </a:prstGeom>
+          <a:noFill/>
+        </p:spPr>
+        <p:txBody>
+          <a:bodyPr wrap="square" lIns="54864" rIns="54864" tIns="27432" bIns="27432" anchor="t">
+            <a:noAutofit/>
+          </a:bodyPr>
+          <a:lstStyle/>
+          <a:p>
+            <a:pPr algn="l">
+              <a:lnSpc>
+                <a:spcPct val="115000"/>
+              </a:lnSpc>
+            </a:pPr>
+            <a:r>
+              <a:rPr sz="1000" b="1" i="0" spc="250">
+                <a:solidFill>
+                  <a:srgbClr val="26231F"/>
+                </a:solidFill>
+              </a:rPr>
+              <a:t>FAMILY ALBUM</a:t>
+            </a:r>
+          </a:p>
+        </p:txBody>
+      </p:sp>
       <p:sp>
         <p:nvSpPr>
           <p:cNvPr id="2" name="Title 1"/>
@@ -3329,8 +3423,8 @@
         </p:nvSpPr>
         <p:spPr>
           <a:xfrm>
-            <a:off x="853418" y="2057400"/>
-            <a:ext cx="6095847" cy="1554480"/>
+            <a:off x="822960" y="2606040"/>
+            <a:ext cx="5608179" cy="1188720"/>
           </a:xfrm>
         </p:spPr>
         <p:txBody>
@@ -3345,9 +3439,9 @@
               </a:lnSpc>
             </a:pPr>
             <a:r>
-              <a:rPr sz="3600" b="1" i="0">
-                <a:solidFill>
-                  <a:srgbClr val="492713"/>
+              <a:rPr sz="4000" b="1" i="0">
+                <a:solidFill>
+                  <a:srgbClr val="26231F"/>
                 </a:solidFill>
               </a:rPr>
               <a:t>우리 가족을 소개합니다</a:t>
@@ -3357,14 +3451,14 @@
       </p:sp>
       <p:sp>
         <p:nvSpPr>
-          <p:cNvPr id="4" name="한 줄 문구"/>
+          <p:cNvPr id="6" name="한 줄 문구"/>
           <p:cNvSpPr txBox="1"/>
           <p:nvPr/>
         </p:nvSpPr>
         <p:spPr>
           <a:xfrm>
-            <a:off x="853418" y="3749039"/>
-            <a:ext cx="6095847" cy="822960"/>
+            <a:off x="822960" y="3886200"/>
+            <a:ext cx="5608179" cy="822960"/>
           </a:xfrm>
           <a:prstGeom prst="rect">
             <a:avLst/>
@@ -3383,9 +3477,9 @@
               </a:lnSpc>
             </a:pPr>
             <a:r>
-              <a:rPr sz="1700" b="0" i="1">
-                <a:solidFill>
-                  <a:srgbClr val="492713"/>
+              <a:rPr sz="1700" b="0" i="0">
+                <a:solidFill>
+                  <a:srgbClr val="26231F"/>
                 </a:solidFill>
               </a:rPr>
               <a:t>군고구마 한 봉지 나눠 들고</a:t>
@@ -3395,14 +3489,14 @@
       </p:sp>
       <p:sp>
         <p:nvSpPr>
-          <p:cNvPr id="5" name="안내 문구"/>
+          <p:cNvPr id="7" name="안내 문구"/>
           <p:cNvSpPr txBox="1"/>
           <p:nvPr/>
         </p:nvSpPr>
         <p:spPr>
           <a:xfrm>
-            <a:off x="853418" y="4617720"/>
-            <a:ext cx="6095847" cy="914400"/>
+            <a:off x="822960" y="4754880"/>
+            <a:ext cx="5608179" cy="914400"/>
           </a:xfrm>
           <a:prstGeom prst="rect">
             <a:avLst/>
@@ -3423,10 +3517,10 @@
             <a:r>
               <a:rPr sz="1400" b="0" i="0">
                 <a:solidFill>
-                  <a:srgbClr val="666666"/>
-                </a:solidFill>
-              </a:rPr>
-              <a:t>3대 가족 · 2027. 00. 00</a:t>
+                  <a:srgbClr val="26231F"/>
+                </a:solidFill>
+              </a:rPr>
+              <a:t>3대 가족 · 날짜 입력</a:t>
             </a:r>
           </a:p>
         </p:txBody>
@@ -3445,7 +3539,7 @@
     <p:bg>
       <p:bgPr>
         <a:solidFill>
-          <a:srgbClr val="FBF3EF"/>
+          <a:srgbClr val="FFFFFF"/>
         </a:solidFill>
         <a:effectLst/>
       </p:bgPr>
@@ -3465,17 +3559,17 @@
         </p:nvSpPr>
         <p:spPr>
           <a:xfrm>
-            <a:off x="256032" y="256032"/>
-            <a:ext cx="11679631" cy="6345936"/>
+            <a:off x="0" y="6565392"/>
+            <a:ext cx="12191695" cy="292608"/>
           </a:xfrm>
           <a:prstGeom prst="rect">
             <a:avLst/>
           </a:prstGeom>
-          <a:noFill/>
-          <a:ln w="28575">
-            <a:solidFill>
-              <a:srgbClr val="995229"/>
-            </a:solidFill>
+          <a:solidFill>
+            <a:srgbClr val="EBC4AD"/>
+          </a:solidFill>
+          <a:ln>
+            <a:noFill/>
           </a:ln>
         </p:spPr>
         <p:txBody>
@@ -3494,17 +3588,86 @@
         </p:nvSpPr>
         <p:spPr>
           <a:xfrm>
-            <a:off x="384048" y="384048"/>
-            <a:ext cx="11423599" cy="6089904"/>
+            <a:off x="640080" y="566928"/>
+            <a:ext cx="64008" cy="868680"/>
+          </a:xfrm>
+          <a:prstGeom prst="roundRect">
+            <a:avLst>
+              <a:gd name="adj" fmla="val 50000"/>
+            </a:avLst>
+          </a:prstGeom>
+          <a:solidFill>
+            <a:srgbClr val="D89C79"/>
+          </a:solidFill>
+          <a:ln>
+            <a:noFill/>
+          </a:ln>
+        </p:spPr>
+        <p:txBody>
+          <a:bodyPr rtlCol="0" anchor="ctr"/>
+          <a:lstStyle/>
+          <a:p>
+            <a:pPr algn="ctr"/>
+          </a:p>
+        </p:txBody>
+      </p:sp>
+      <p:sp>
+        <p:nvSpPr>
+          <p:cNvPr id="5" name="상단 라벨"/>
+          <p:cNvSpPr txBox="1"/>
+          <p:nvPr/>
+        </p:nvSpPr>
+        <p:spPr>
+          <a:xfrm>
+            <a:off x="868680" y="274320"/>
+            <a:ext cx="5486400" cy="274320"/>
           </a:xfrm>
           <a:prstGeom prst="rect">
             <a:avLst/>
           </a:prstGeom>
           <a:noFill/>
-          <a:ln w="9525">
-            <a:solidFill>
-              <a:srgbClr val="F4DBCD"/>
-            </a:solidFill>
+        </p:spPr>
+        <p:txBody>
+          <a:bodyPr wrap="square" lIns="54864" rIns="54864" tIns="27432" bIns="27432" anchor="ctr">
+            <a:noAutofit/>
+          </a:bodyPr>
+          <a:lstStyle/>
+          <a:p>
+            <a:pPr algn="l">
+              <a:lnSpc>
+                <a:spcPct val="115000"/>
+              </a:lnSpc>
+            </a:pPr>
+            <a:r>
+              <a:rPr sz="900" b="1" i="0" spc="250">
+                <a:solidFill>
+                  <a:srgbClr val="8E8780"/>
+                </a:solidFill>
+              </a:rPr>
+              <a:t>FAMILY ALBUM</a:t>
+            </a:r>
+          </a:p>
+        </p:txBody>
+      </p:sp>
+      <p:sp>
+        <p:nvSpPr>
+          <p:cNvPr id="6" name="포인트"/>
+          <p:cNvSpPr/>
+          <p:nvPr/>
+        </p:nvSpPr>
+        <p:spPr>
+          <a:xfrm>
+            <a:off x="11167567" y="667512"/>
+            <a:ext cx="310896" cy="310896"/>
+          </a:xfrm>
+          <a:prstGeom prst="donut">
+            <a:avLst/>
+          </a:prstGeom>
+          <a:solidFill>
+            <a:srgbClr val="EBC4AD"/>
+          </a:solidFill>
+          <a:ln>
+            <a:noFill/>
           </a:ln>
         </p:spPr>
         <p:txBody>
@@ -3527,8 +3690,8 @@
         </p:nvSpPr>
         <p:spPr>
           <a:xfrm>
-            <a:off x="822960" y="548640"/>
-            <a:ext cx="9265615" cy="822960"/>
+            <a:off x="868680" y="566928"/>
+            <a:ext cx="9448495" cy="868680"/>
           </a:xfrm>
         </p:spPr>
         <p:txBody>
@@ -3545,7 +3708,7 @@
             <a:r>
               <a:rPr sz="3000" b="1" i="0">
                 <a:solidFill>
-                  <a:srgbClr val="492713"/>
+                  <a:srgbClr val="26231F"/>
                 </a:solidFill>
               </a:rPr>
               <a:t>가족 구성원</a:t>
@@ -3555,25 +3718,23 @@
       </p:sp>
       <p:sp>
         <p:nvSpPr>
-          <p:cNvPr id="5" name="사진 자리"/>
+          <p:cNvPr id="7" name="사진 자리"/>
           <p:cNvSpPr/>
           <p:nvPr/>
         </p:nvSpPr>
         <p:spPr>
           <a:xfrm>
-            <a:off x="960120" y="1554480"/>
-            <a:ext cx="1292809" cy="1292809"/>
+            <a:off x="777240" y="1783080"/>
+            <a:ext cx="1353769" cy="1353769"/>
           </a:xfrm>
           <a:prstGeom prst="ellipse">
             <a:avLst/>
           </a:prstGeom>
           <a:solidFill>
-            <a:srgbClr val="F4DBCD"/>
+            <a:srgbClr val="F6E1D5"/>
           </a:solidFill>
           <a:ln w="19050">
-            <a:solidFill>
-              <a:srgbClr val="995229"/>
-            </a:solidFill>
+            <a:noFill/>
             <a:prstDash val="dash"/>
           </a:ln>
         </p:spPr>
@@ -3591,7 +3752,7 @@
             <a:r>
               <a:rPr sz="1200" b="0" i="0">
                 <a:solidFill>
-                  <a:srgbClr val="492713"/>
+                  <a:srgbClr val="8E8780"/>
                 </a:solidFill>
               </a:rPr>
               <a:t>사진</a:t>
@@ -3601,14 +3762,14 @@
       </p:sp>
       <p:sp>
         <p:nvSpPr>
-          <p:cNvPr id="6" name="TextBox 5"/>
+          <p:cNvPr id="8" name="TextBox 7"/>
           <p:cNvSpPr txBox="1"/>
           <p:nvPr/>
         </p:nvSpPr>
         <p:spPr>
           <a:xfrm>
-            <a:off x="822960" y="2938729"/>
-            <a:ext cx="1567129" cy="411480"/>
+            <a:off x="640080" y="3228289"/>
+            <a:ext cx="1628089" cy="411480"/>
           </a:xfrm>
           <a:prstGeom prst="rect">
             <a:avLst/>
@@ -3629,7 +3790,7 @@
             <a:r>
               <a:rPr sz="1600" b="1" i="0">
                 <a:solidFill>
-                  <a:srgbClr val="492713"/>
+                  <a:srgbClr val="493427"/>
                 </a:solidFill>
               </a:rPr>
               <a:t>할아버지</a:t>
@@ -3639,14 +3800,14 @@
       </p:sp>
       <p:sp>
         <p:nvSpPr>
-          <p:cNvPr id="7" name="TextBox 6"/>
+          <p:cNvPr id="9" name="TextBox 8"/>
           <p:cNvSpPr txBox="1"/>
           <p:nvPr/>
         </p:nvSpPr>
         <p:spPr>
           <a:xfrm>
-            <a:off x="914400" y="3395929"/>
-            <a:ext cx="1384249" cy="2776270"/>
+            <a:off x="731519" y="3685489"/>
+            <a:ext cx="1445209" cy="2486710"/>
           </a:xfrm>
           <a:prstGeom prst="rect">
             <a:avLst/>
@@ -3707,25 +3868,23 @@
       </p:sp>
       <p:sp>
         <p:nvSpPr>
-          <p:cNvPr id="8" name="사진 자리"/>
+          <p:cNvPr id="10" name="사진 자리"/>
           <p:cNvSpPr/>
           <p:nvPr/>
         </p:nvSpPr>
         <p:spPr>
           <a:xfrm>
-            <a:off x="2755849" y="1554480"/>
-            <a:ext cx="1292809" cy="1292809"/>
+            <a:off x="2633929" y="1783080"/>
+            <a:ext cx="1353769" cy="1353769"/>
           </a:xfrm>
           <a:prstGeom prst="ellipse">
             <a:avLst/>
           </a:prstGeom>
           <a:solidFill>
-            <a:srgbClr val="F4DBCD"/>
+            <a:srgbClr val="F6E1D5"/>
           </a:solidFill>
           <a:ln w="19050">
-            <a:solidFill>
-              <a:srgbClr val="995229"/>
-            </a:solidFill>
+            <a:noFill/>
             <a:prstDash val="dash"/>
           </a:ln>
         </p:spPr>
@@ -3743,7 +3902,7 @@
             <a:r>
               <a:rPr sz="1200" b="0" i="0">
                 <a:solidFill>
-                  <a:srgbClr val="492713"/>
+                  <a:srgbClr val="8E8780"/>
                 </a:solidFill>
               </a:rPr>
               <a:t>사진</a:t>
@@ -3753,14 +3912,14 @@
       </p:sp>
       <p:sp>
         <p:nvSpPr>
-          <p:cNvPr id="9" name="TextBox 8"/>
+          <p:cNvPr id="11" name="TextBox 10"/>
           <p:cNvSpPr txBox="1"/>
           <p:nvPr/>
         </p:nvSpPr>
         <p:spPr>
           <a:xfrm>
-            <a:off x="2618689" y="2938729"/>
-            <a:ext cx="1567129" cy="411480"/>
+            <a:off x="2496769" y="3228289"/>
+            <a:ext cx="1628089" cy="411480"/>
           </a:xfrm>
           <a:prstGeom prst="rect">
             <a:avLst/>
@@ -3781,7 +3940,7 @@
             <a:r>
               <a:rPr sz="1600" b="1" i="0">
                 <a:solidFill>
-                  <a:srgbClr val="492713"/>
+                  <a:srgbClr val="493427"/>
                 </a:solidFill>
               </a:rPr>
               <a:t>할머니</a:t>
@@ -3791,14 +3950,14 @@
       </p:sp>
       <p:sp>
         <p:nvSpPr>
-          <p:cNvPr id="10" name="TextBox 9"/>
+          <p:cNvPr id="12" name="TextBox 11"/>
           <p:cNvSpPr txBox="1"/>
           <p:nvPr/>
         </p:nvSpPr>
         <p:spPr>
           <a:xfrm>
-            <a:off x="2710129" y="3395929"/>
-            <a:ext cx="1384249" cy="2776270"/>
+            <a:off x="2588209" y="3685489"/>
+            <a:ext cx="1445209" cy="2486710"/>
           </a:xfrm>
           <a:prstGeom prst="rect">
             <a:avLst/>
@@ -3859,25 +4018,23 @@
       </p:sp>
       <p:sp>
         <p:nvSpPr>
-          <p:cNvPr id="11" name="사진 자리"/>
+          <p:cNvPr id="13" name="사진 자리"/>
           <p:cNvSpPr/>
           <p:nvPr/>
         </p:nvSpPr>
         <p:spPr>
           <a:xfrm>
-            <a:off x="4551578" y="1554480"/>
-            <a:ext cx="1292809" cy="1292809"/>
+            <a:off x="4490618" y="1783080"/>
+            <a:ext cx="1353769" cy="1353769"/>
           </a:xfrm>
           <a:prstGeom prst="ellipse">
             <a:avLst/>
           </a:prstGeom>
           <a:solidFill>
-            <a:srgbClr val="F4DBCD"/>
+            <a:srgbClr val="F6E1D5"/>
           </a:solidFill>
           <a:ln w="19050">
-            <a:solidFill>
-              <a:srgbClr val="995229"/>
-            </a:solidFill>
+            <a:noFill/>
             <a:prstDash val="dash"/>
           </a:ln>
         </p:spPr>
@@ -3895,7 +4052,7 @@
             <a:r>
               <a:rPr sz="1200" b="0" i="0">
                 <a:solidFill>
-                  <a:srgbClr val="492713"/>
+                  <a:srgbClr val="8E8780"/>
                 </a:solidFill>
               </a:rPr>
               <a:t>사진</a:t>
@@ -3905,14 +4062,14 @@
       </p:sp>
       <p:sp>
         <p:nvSpPr>
-          <p:cNvPr id="12" name="TextBox 11"/>
+          <p:cNvPr id="14" name="TextBox 13"/>
           <p:cNvSpPr txBox="1"/>
           <p:nvPr/>
         </p:nvSpPr>
         <p:spPr>
           <a:xfrm>
-            <a:off x="4414418" y="2938729"/>
-            <a:ext cx="1567129" cy="411480"/>
+            <a:off x="4353458" y="3228289"/>
+            <a:ext cx="1628089" cy="411480"/>
           </a:xfrm>
           <a:prstGeom prst="rect">
             <a:avLst/>
@@ -3933,7 +4090,7 @@
             <a:r>
               <a:rPr sz="1600" b="1" i="0">
                 <a:solidFill>
-                  <a:srgbClr val="492713"/>
+                  <a:srgbClr val="493427"/>
                 </a:solidFill>
               </a:rPr>
               <a:t>아빠</a:t>
@@ -3943,14 +4100,14 @@
       </p:sp>
       <p:sp>
         <p:nvSpPr>
-          <p:cNvPr id="13" name="TextBox 12"/>
+          <p:cNvPr id="15" name="TextBox 14"/>
           <p:cNvSpPr txBox="1"/>
           <p:nvPr/>
         </p:nvSpPr>
         <p:spPr>
           <a:xfrm>
-            <a:off x="4505858" y="3395929"/>
-            <a:ext cx="1384249" cy="2776270"/>
+            <a:off x="4444898" y="3685489"/>
+            <a:ext cx="1445209" cy="2486710"/>
           </a:xfrm>
           <a:prstGeom prst="rect">
             <a:avLst/>
@@ -4011,25 +4168,23 @@
       </p:sp>
       <p:sp>
         <p:nvSpPr>
-          <p:cNvPr id="14" name="사진 자리"/>
+          <p:cNvPr id="16" name="사진 자리"/>
           <p:cNvSpPr/>
           <p:nvPr/>
         </p:nvSpPr>
         <p:spPr>
           <a:xfrm>
-            <a:off x="6347307" y="1554480"/>
-            <a:ext cx="1292809" cy="1292809"/>
+            <a:off x="6347307" y="1783080"/>
+            <a:ext cx="1353769" cy="1353769"/>
           </a:xfrm>
           <a:prstGeom prst="ellipse">
             <a:avLst/>
           </a:prstGeom>
           <a:solidFill>
-            <a:srgbClr val="F4DBCD"/>
+            <a:srgbClr val="F6E1D5"/>
           </a:solidFill>
           <a:ln w="19050">
-            <a:solidFill>
-              <a:srgbClr val="995229"/>
-            </a:solidFill>
+            <a:noFill/>
             <a:prstDash val="dash"/>
           </a:ln>
         </p:spPr>
@@ -4047,7 +4202,7 @@
             <a:r>
               <a:rPr sz="1200" b="0" i="0">
                 <a:solidFill>
-                  <a:srgbClr val="492713"/>
+                  <a:srgbClr val="8E8780"/>
                 </a:solidFill>
               </a:rPr>
               <a:t>사진</a:t>
@@ -4057,14 +4212,14 @@
       </p:sp>
       <p:sp>
         <p:nvSpPr>
-          <p:cNvPr id="15" name="TextBox 14"/>
+          <p:cNvPr id="17" name="TextBox 16"/>
           <p:cNvSpPr txBox="1"/>
           <p:nvPr/>
         </p:nvSpPr>
         <p:spPr>
           <a:xfrm>
-            <a:off x="6210147" y="2938729"/>
-            <a:ext cx="1567129" cy="411480"/>
+            <a:off x="6210147" y="3228289"/>
+            <a:ext cx="1628089" cy="411480"/>
           </a:xfrm>
           <a:prstGeom prst="rect">
             <a:avLst/>
@@ -4085,7 +4240,7 @@
             <a:r>
               <a:rPr sz="1600" b="1" i="0">
                 <a:solidFill>
-                  <a:srgbClr val="492713"/>
+                  <a:srgbClr val="493427"/>
                 </a:solidFill>
               </a:rPr>
               <a:t>엄마</a:t>
@@ -4095,14 +4250,14 @@
       </p:sp>
       <p:sp>
         <p:nvSpPr>
-          <p:cNvPr id="16" name="TextBox 15"/>
+          <p:cNvPr id="18" name="TextBox 17"/>
           <p:cNvSpPr txBox="1"/>
           <p:nvPr/>
         </p:nvSpPr>
         <p:spPr>
           <a:xfrm>
-            <a:off x="6301587" y="3395929"/>
-            <a:ext cx="1384249" cy="2776270"/>
+            <a:off x="6301587" y="3685489"/>
+            <a:ext cx="1445209" cy="2486710"/>
           </a:xfrm>
           <a:prstGeom prst="rect">
             <a:avLst/>
@@ -4163,25 +4318,23 @@
       </p:sp>
       <p:sp>
         <p:nvSpPr>
-          <p:cNvPr id="17" name="사진 자리"/>
+          <p:cNvPr id="19" name="사진 자리"/>
           <p:cNvSpPr/>
           <p:nvPr/>
         </p:nvSpPr>
         <p:spPr>
           <a:xfrm>
-            <a:off x="8143036" y="1554480"/>
-            <a:ext cx="1292809" cy="1292809"/>
+            <a:off x="8203996" y="1783080"/>
+            <a:ext cx="1353769" cy="1353769"/>
           </a:xfrm>
           <a:prstGeom prst="ellipse">
             <a:avLst/>
           </a:prstGeom>
           <a:solidFill>
-            <a:srgbClr val="F4DBCD"/>
+            <a:srgbClr val="F6E1D5"/>
           </a:solidFill>
           <a:ln w="19050">
-            <a:solidFill>
-              <a:srgbClr val="995229"/>
-            </a:solidFill>
+            <a:noFill/>
             <a:prstDash val="dash"/>
           </a:ln>
         </p:spPr>
@@ -4199,7 +4352,7 @@
             <a:r>
               <a:rPr sz="1200" b="0" i="0">
                 <a:solidFill>
-                  <a:srgbClr val="492713"/>
+                  <a:srgbClr val="8E8780"/>
                 </a:solidFill>
               </a:rPr>
               <a:t>사진</a:t>
@@ -4209,14 +4362,14 @@
       </p:sp>
       <p:sp>
         <p:nvSpPr>
-          <p:cNvPr id="18" name="TextBox 17"/>
+          <p:cNvPr id="20" name="TextBox 19"/>
           <p:cNvSpPr txBox="1"/>
           <p:nvPr/>
         </p:nvSpPr>
         <p:spPr>
           <a:xfrm>
-            <a:off x="8005876" y="2938729"/>
-            <a:ext cx="1567129" cy="411480"/>
+            <a:off x="8066836" y="3228289"/>
+            <a:ext cx="1628089" cy="411480"/>
           </a:xfrm>
           <a:prstGeom prst="rect">
             <a:avLst/>
@@ -4237,7 +4390,7 @@
             <a:r>
               <a:rPr sz="1600" b="1" i="0">
                 <a:solidFill>
-                  <a:srgbClr val="492713"/>
+                  <a:srgbClr val="493427"/>
                 </a:solidFill>
               </a:rPr>
               <a:t>큰아이</a:t>
@@ -4247,14 +4400,14 @@
       </p:sp>
       <p:sp>
         <p:nvSpPr>
-          <p:cNvPr id="19" name="TextBox 18"/>
+          <p:cNvPr id="21" name="TextBox 20"/>
           <p:cNvSpPr txBox="1"/>
           <p:nvPr/>
         </p:nvSpPr>
         <p:spPr>
           <a:xfrm>
-            <a:off x="8097316" y="3395929"/>
-            <a:ext cx="1384249" cy="2776270"/>
+            <a:off x="8158276" y="3685489"/>
+            <a:ext cx="1445209" cy="2486710"/>
           </a:xfrm>
           <a:prstGeom prst="rect">
             <a:avLst/>
@@ -4315,25 +4468,23 @@
       </p:sp>
       <p:sp>
         <p:nvSpPr>
-          <p:cNvPr id="20" name="사진 자리"/>
+          <p:cNvPr id="22" name="사진 자리"/>
           <p:cNvSpPr/>
           <p:nvPr/>
         </p:nvSpPr>
         <p:spPr>
           <a:xfrm>
-            <a:off x="9938766" y="1554480"/>
-            <a:ext cx="1292809" cy="1292809"/>
+            <a:off x="10060686" y="1783080"/>
+            <a:ext cx="1353769" cy="1353769"/>
           </a:xfrm>
           <a:prstGeom prst="ellipse">
             <a:avLst/>
           </a:prstGeom>
           <a:solidFill>
-            <a:srgbClr val="F4DBCD"/>
+            <a:srgbClr val="F6E1D5"/>
           </a:solidFill>
           <a:ln w="19050">
-            <a:solidFill>
-              <a:srgbClr val="995229"/>
-            </a:solidFill>
+            <a:noFill/>
             <a:prstDash val="dash"/>
           </a:ln>
         </p:spPr>
@@ -4351,7 +4502,7 @@
             <a:r>
               <a:rPr sz="1200" b="0" i="0">
                 <a:solidFill>
-                  <a:srgbClr val="492713"/>
+                  <a:srgbClr val="8E8780"/>
                 </a:solidFill>
               </a:rPr>
               <a:t>사진</a:t>
@@ -4361,14 +4512,14 @@
       </p:sp>
       <p:sp>
         <p:nvSpPr>
-          <p:cNvPr id="21" name="TextBox 20"/>
+          <p:cNvPr id="23" name="TextBox 22"/>
           <p:cNvSpPr txBox="1"/>
           <p:nvPr/>
         </p:nvSpPr>
         <p:spPr>
           <a:xfrm>
-            <a:off x="9801606" y="2938729"/>
-            <a:ext cx="1567129" cy="411480"/>
+            <a:off x="9923526" y="3228289"/>
+            <a:ext cx="1628089" cy="411480"/>
           </a:xfrm>
           <a:prstGeom prst="rect">
             <a:avLst/>
@@ -4389,7 +4540,7 @@
             <a:r>
               <a:rPr sz="1600" b="1" i="0">
                 <a:solidFill>
-                  <a:srgbClr val="492713"/>
+                  <a:srgbClr val="493427"/>
                 </a:solidFill>
               </a:rPr>
               <a:t>작은아이</a:t>
@@ -4399,14 +4550,14 @@
       </p:sp>
       <p:sp>
         <p:nvSpPr>
-          <p:cNvPr id="22" name="TextBox 21"/>
+          <p:cNvPr id="24" name="TextBox 23"/>
           <p:cNvSpPr txBox="1"/>
           <p:nvPr/>
         </p:nvSpPr>
         <p:spPr>
           <a:xfrm>
-            <a:off x="9893046" y="3395929"/>
-            <a:ext cx="1384249" cy="2776270"/>
+            <a:off x="10014965" y="3685489"/>
+            <a:ext cx="1445209" cy="2486710"/>
           </a:xfrm>
           <a:prstGeom prst="rect">
             <a:avLst/>
@@ -4479,7 +4630,7 @@
     <p:bg>
       <p:bgPr>
         <a:solidFill>
-          <a:srgbClr val="FBF3EF"/>
+          <a:srgbClr val="FFFFFF"/>
         </a:solidFill>
         <a:effectLst/>
       </p:bgPr>
@@ -4499,17 +4650,17 @@
         </p:nvSpPr>
         <p:spPr>
           <a:xfrm>
-            <a:off x="256032" y="256032"/>
-            <a:ext cx="11679631" cy="6345936"/>
+            <a:off x="0" y="6565392"/>
+            <a:ext cx="12191695" cy="292608"/>
           </a:xfrm>
           <a:prstGeom prst="rect">
             <a:avLst/>
           </a:prstGeom>
-          <a:noFill/>
-          <a:ln w="28575">
-            <a:solidFill>
-              <a:srgbClr val="995229"/>
-            </a:solidFill>
+          <a:solidFill>
+            <a:srgbClr val="EBC4AD"/>
+          </a:solidFill>
+          <a:ln>
+            <a:noFill/>
           </a:ln>
         </p:spPr>
         <p:txBody>
@@ -4528,17 +4679,86 @@
         </p:nvSpPr>
         <p:spPr>
           <a:xfrm>
-            <a:off x="384048" y="384048"/>
-            <a:ext cx="11423599" cy="6089904"/>
+            <a:off x="640080" y="566928"/>
+            <a:ext cx="64008" cy="868680"/>
+          </a:xfrm>
+          <a:prstGeom prst="roundRect">
+            <a:avLst>
+              <a:gd name="adj" fmla="val 50000"/>
+            </a:avLst>
+          </a:prstGeom>
+          <a:solidFill>
+            <a:srgbClr val="D89C79"/>
+          </a:solidFill>
+          <a:ln>
+            <a:noFill/>
+          </a:ln>
+        </p:spPr>
+        <p:txBody>
+          <a:bodyPr rtlCol="0" anchor="ctr"/>
+          <a:lstStyle/>
+          <a:p>
+            <a:pPr algn="ctr"/>
+          </a:p>
+        </p:txBody>
+      </p:sp>
+      <p:sp>
+        <p:nvSpPr>
+          <p:cNvPr id="5" name="상단 라벨"/>
+          <p:cNvSpPr txBox="1"/>
+          <p:nvPr/>
+        </p:nvSpPr>
+        <p:spPr>
+          <a:xfrm>
+            <a:off x="868680" y="274320"/>
+            <a:ext cx="5486400" cy="274320"/>
           </a:xfrm>
           <a:prstGeom prst="rect">
             <a:avLst/>
           </a:prstGeom>
           <a:noFill/>
-          <a:ln w="9525">
-            <a:solidFill>
-              <a:srgbClr val="F4DBCD"/>
-            </a:solidFill>
+        </p:spPr>
+        <p:txBody>
+          <a:bodyPr wrap="square" lIns="54864" rIns="54864" tIns="27432" bIns="27432" anchor="ctr">
+            <a:noAutofit/>
+          </a:bodyPr>
+          <a:lstStyle/>
+          <a:p>
+            <a:pPr algn="l">
+              <a:lnSpc>
+                <a:spcPct val="115000"/>
+              </a:lnSpc>
+            </a:pPr>
+            <a:r>
+              <a:rPr sz="900" b="1" i="0" spc="250">
+                <a:solidFill>
+                  <a:srgbClr val="8E8780"/>
+                </a:solidFill>
+              </a:rPr>
+              <a:t>FAMILY ALBUM</a:t>
+            </a:r>
+          </a:p>
+        </p:txBody>
+      </p:sp>
+      <p:sp>
+        <p:nvSpPr>
+          <p:cNvPr id="6" name="포인트"/>
+          <p:cNvSpPr/>
+          <p:nvPr/>
+        </p:nvSpPr>
+        <p:spPr>
+          <a:xfrm>
+            <a:off x="11167567" y="667512"/>
+            <a:ext cx="310896" cy="310896"/>
+          </a:xfrm>
+          <a:prstGeom prst="donut">
+            <a:avLst/>
+          </a:prstGeom>
+          <a:solidFill>
+            <a:srgbClr val="EBC4AD"/>
+          </a:solidFill>
+          <a:ln>
+            <a:noFill/>
           </a:ln>
         </p:spPr>
         <p:txBody>
@@ -4561,8 +4781,8 @@
         </p:nvSpPr>
         <p:spPr>
           <a:xfrm>
-            <a:off x="822960" y="548640"/>
-            <a:ext cx="9265615" cy="822960"/>
+            <a:off x="868680" y="566928"/>
+            <a:ext cx="9448495" cy="868680"/>
           </a:xfrm>
         </p:spPr>
         <p:txBody>
@@ -4579,7 +4799,7 @@
             <a:r>
               <a:rPr sz="3000" b="1" i="0">
                 <a:solidFill>
-                  <a:srgbClr val="492713"/>
+                  <a:srgbClr val="26231F"/>
                 </a:solidFill>
               </a:rPr>
               <a:t>우리 가족 이야기</a:t>
@@ -4589,20 +4809,20 @@
       </p:sp>
       <p:sp>
         <p:nvSpPr>
-          <p:cNvPr id="5" name="타임라인 선"/>
+          <p:cNvPr id="7" name="타임라인 선"/>
           <p:cNvSpPr/>
           <p:nvPr/>
         </p:nvSpPr>
         <p:spPr>
           <a:xfrm>
-            <a:off x="822960" y="3291840"/>
-            <a:ext cx="10545775" cy="54864"/>
+            <a:off x="640080" y="3520440"/>
+            <a:ext cx="10911535" cy="54864"/>
           </a:xfrm>
           <a:prstGeom prst="rect">
             <a:avLst/>
           </a:prstGeom>
           <a:solidFill>
-            <a:srgbClr val="F4DBCD"/>
+            <a:srgbClr val="F6E1D5"/>
           </a:solidFill>
           <a:ln>
             <a:noFill/>
@@ -4618,20 +4838,20 @@
       </p:sp>
       <p:sp>
         <p:nvSpPr>
-          <p:cNvPr id="6" name="때 1"/>
+          <p:cNvPr id="8" name="때 1"/>
           <p:cNvSpPr/>
           <p:nvPr/>
         </p:nvSpPr>
         <p:spPr>
           <a:xfrm>
-            <a:off x="1940013" y="3108960"/>
+            <a:off x="1802853" y="3337560"/>
             <a:ext cx="402336" cy="402336"/>
           </a:xfrm>
           <a:prstGeom prst="ellipse">
             <a:avLst/>
           </a:prstGeom>
           <a:solidFill>
-            <a:srgbClr val="995229"/>
+            <a:srgbClr val="D89C79"/>
           </a:solidFill>
           <a:ln w="38100">
             <a:solidFill>
@@ -4649,14 +4869,14 @@
       </p:sp>
       <p:sp>
         <p:nvSpPr>
-          <p:cNvPr id="7" name="TextBox 6"/>
+          <p:cNvPr id="9" name="TextBox 8"/>
           <p:cNvSpPr txBox="1"/>
           <p:nvPr/>
         </p:nvSpPr>
         <p:spPr>
           <a:xfrm>
-            <a:off x="868680" y="2468880"/>
-            <a:ext cx="2545003" cy="457200"/>
+            <a:off x="685800" y="2697480"/>
+            <a:ext cx="2636443" cy="457200"/>
           </a:xfrm>
           <a:prstGeom prst="rect">
             <a:avLst/>
@@ -4677,7 +4897,7 @@
             <a:r>
               <a:rPr sz="1600" b="1" i="0">
                 <a:solidFill>
-                  <a:srgbClr val="995229"/>
+                  <a:srgbClr val="D89C79"/>
                 </a:solidFill>
               </a:rPr>
               <a:t>할아버지 할머니의 이야기</a:t>
@@ -4687,14 +4907,14 @@
       </p:sp>
       <p:sp>
         <p:nvSpPr>
-          <p:cNvPr id="8" name="TextBox 7"/>
+          <p:cNvPr id="10" name="TextBox 9"/>
           <p:cNvSpPr txBox="1"/>
           <p:nvPr/>
         </p:nvSpPr>
         <p:spPr>
           <a:xfrm>
-            <a:off x="914400" y="3657600"/>
-            <a:ext cx="2453563" cy="457200"/>
+            <a:off x="731519" y="3886200"/>
+            <a:ext cx="2545003" cy="457200"/>
           </a:xfrm>
           <a:prstGeom prst="rect">
             <a:avLst/>
@@ -4715,7 +4935,7 @@
             <a:r>
               <a:rPr sz="1800" b="1" i="0">
                 <a:solidFill>
-                  <a:srgbClr val="492713"/>
+                  <a:srgbClr val="493427"/>
                 </a:solidFill>
               </a:rPr>
               <a:t>뿌리</a:t>
@@ -4725,14 +4945,14 @@
       </p:sp>
       <p:sp>
         <p:nvSpPr>
-          <p:cNvPr id="9" name="TextBox 8"/>
+          <p:cNvPr id="11" name="TextBox 10"/>
           <p:cNvSpPr txBox="1"/>
           <p:nvPr/>
         </p:nvSpPr>
         <p:spPr>
           <a:xfrm>
-            <a:off x="914400" y="4160520"/>
-            <a:ext cx="2453563" cy="1645920"/>
+            <a:off x="731519" y="4389120"/>
+            <a:ext cx="2545003" cy="1645920"/>
           </a:xfrm>
           <a:prstGeom prst="rect">
             <a:avLst/>
@@ -4753,7 +4973,7 @@
             <a:r>
               <a:rPr sz="1500" b="0" i="0">
                 <a:solidFill>
-                  <a:srgbClr val="2B2B2B"/>
+                  <a:srgbClr val="26231F"/>
                 </a:solidFill>
               </a:rPr>
               <a:t>가족의 시작을 적어요</a:t>
@@ -4763,20 +4983,20 @@
       </p:sp>
       <p:sp>
         <p:nvSpPr>
-          <p:cNvPr id="10" name="때 2"/>
+          <p:cNvPr id="12" name="때 2"/>
           <p:cNvSpPr/>
           <p:nvPr/>
         </p:nvSpPr>
         <p:spPr>
           <a:xfrm>
-            <a:off x="4576457" y="3108960"/>
+            <a:off x="4530737" y="3337560"/>
             <a:ext cx="402336" cy="402336"/>
           </a:xfrm>
           <a:prstGeom prst="ellipse">
             <a:avLst/>
           </a:prstGeom>
           <a:solidFill>
-            <a:srgbClr val="995229"/>
+            <a:srgbClr val="D89C79"/>
           </a:solidFill>
           <a:ln w="38100">
             <a:solidFill>
@@ -4794,14 +5014,14 @@
       </p:sp>
       <p:sp>
         <p:nvSpPr>
-          <p:cNvPr id="11" name="TextBox 10"/>
+          <p:cNvPr id="13" name="TextBox 12"/>
           <p:cNvSpPr txBox="1"/>
           <p:nvPr/>
         </p:nvSpPr>
         <p:spPr>
           <a:xfrm>
-            <a:off x="3505123" y="2468880"/>
-            <a:ext cx="2545003" cy="457200"/>
+            <a:off x="3413683" y="2697480"/>
+            <a:ext cx="2636443" cy="457200"/>
           </a:xfrm>
           <a:prstGeom prst="rect">
             <a:avLst/>
@@ -4822,7 +5042,7 @@
             <a:r>
               <a:rPr sz="1600" b="1" i="0">
                 <a:solidFill>
-                  <a:srgbClr val="995229"/>
+                  <a:srgbClr val="D89C79"/>
                 </a:solidFill>
               </a:rPr>
               <a:t>부모가 된 날</a:t>
@@ -4832,14 +5052,14 @@
       </p:sp>
       <p:sp>
         <p:nvSpPr>
-          <p:cNvPr id="12" name="TextBox 11"/>
+          <p:cNvPr id="14" name="TextBox 13"/>
           <p:cNvSpPr txBox="1"/>
           <p:nvPr/>
         </p:nvSpPr>
         <p:spPr>
           <a:xfrm>
-            <a:off x="3550843" y="3657600"/>
-            <a:ext cx="2453563" cy="457200"/>
+            <a:off x="3459403" y="3886200"/>
+            <a:ext cx="2545003" cy="457200"/>
           </a:xfrm>
           <a:prstGeom prst="rect">
             <a:avLst/>
@@ -4860,7 +5080,7 @@
             <a:r>
               <a:rPr sz="1800" b="1" i="0">
                 <a:solidFill>
-                  <a:srgbClr val="492713"/>
+                  <a:srgbClr val="493427"/>
                 </a:solidFill>
               </a:rPr>
               <a:t>새로운 가지</a:t>
@@ -4870,14 +5090,14 @@
       </p:sp>
       <p:sp>
         <p:nvSpPr>
-          <p:cNvPr id="13" name="TextBox 12"/>
+          <p:cNvPr id="15" name="TextBox 14"/>
           <p:cNvSpPr txBox="1"/>
           <p:nvPr/>
         </p:nvSpPr>
         <p:spPr>
           <a:xfrm>
-            <a:off x="3550843" y="4160520"/>
-            <a:ext cx="2453563" cy="1645920"/>
+            <a:off x="3459403" y="4389120"/>
+            <a:ext cx="2545003" cy="1645920"/>
           </a:xfrm>
           <a:prstGeom prst="rect">
             <a:avLst/>
@@ -4898,7 +5118,7 @@
             <a:r>
               <a:rPr sz="1500" b="0" i="0">
                 <a:solidFill>
-                  <a:srgbClr val="2B2B2B"/>
+                  <a:srgbClr val="26231F"/>
                 </a:solidFill>
               </a:rPr>
               <a:t>그날의 기억을 적어요</a:t>
@@ -4908,20 +5128,20 @@
       </p:sp>
       <p:sp>
         <p:nvSpPr>
-          <p:cNvPr id="14" name="때 3"/>
+          <p:cNvPr id="16" name="때 3"/>
           <p:cNvSpPr/>
           <p:nvPr/>
         </p:nvSpPr>
         <p:spPr>
           <a:xfrm>
-            <a:off x="7212901" y="3108960"/>
+            <a:off x="7258621" y="3337560"/>
             <a:ext cx="402336" cy="402336"/>
           </a:xfrm>
           <a:prstGeom prst="ellipse">
             <a:avLst/>
           </a:prstGeom>
           <a:solidFill>
-            <a:srgbClr val="995229"/>
+            <a:srgbClr val="D89C79"/>
           </a:solidFill>
           <a:ln w="38100">
             <a:solidFill>
@@ -4939,14 +5159,14 @@
       </p:sp>
       <p:sp>
         <p:nvSpPr>
-          <p:cNvPr id="15" name="TextBox 14"/>
+          <p:cNvPr id="17" name="TextBox 16"/>
           <p:cNvSpPr txBox="1"/>
           <p:nvPr/>
         </p:nvSpPr>
         <p:spPr>
           <a:xfrm>
-            <a:off x="6141567" y="2468880"/>
-            <a:ext cx="2545003" cy="457200"/>
+            <a:off x="6141567" y="2697480"/>
+            <a:ext cx="2636443" cy="457200"/>
           </a:xfrm>
           <a:prstGeom prst="rect">
             <a:avLst/>
@@ -4967,7 +5187,7 @@
             <a:r>
               <a:rPr sz="1600" b="1" i="0">
                 <a:solidFill>
-                  <a:srgbClr val="995229"/>
+                  <a:srgbClr val="D89C79"/>
                 </a:solidFill>
               </a:rPr>
               <a:t>온 가족 모임</a:t>
@@ -4977,14 +5197,14 @@
       </p:sp>
       <p:sp>
         <p:nvSpPr>
-          <p:cNvPr id="16" name="TextBox 15"/>
+          <p:cNvPr id="18" name="TextBox 17"/>
           <p:cNvSpPr txBox="1"/>
           <p:nvPr/>
         </p:nvSpPr>
         <p:spPr>
           <a:xfrm>
-            <a:off x="6187287" y="3657600"/>
-            <a:ext cx="2453563" cy="457200"/>
+            <a:off x="6187287" y="3886200"/>
+            <a:ext cx="2545003" cy="457200"/>
           </a:xfrm>
           <a:prstGeom prst="rect">
             <a:avLst/>
@@ -5005,7 +5225,7 @@
             <a:r>
               <a:rPr sz="1800" b="1" i="0">
                 <a:solidFill>
-                  <a:srgbClr val="492713"/>
+                  <a:srgbClr val="493427"/>
                 </a:solidFill>
               </a:rPr>
               <a:t>한자리에 모인 날</a:t>
@@ -5015,14 +5235,14 @@
       </p:sp>
       <p:sp>
         <p:nvSpPr>
-          <p:cNvPr id="17" name="TextBox 16"/>
+          <p:cNvPr id="19" name="TextBox 18"/>
           <p:cNvSpPr txBox="1"/>
           <p:nvPr/>
         </p:nvSpPr>
         <p:spPr>
           <a:xfrm>
-            <a:off x="6187287" y="4160520"/>
-            <a:ext cx="2453563" cy="1645920"/>
+            <a:off x="6187287" y="4389120"/>
+            <a:ext cx="2545003" cy="1645920"/>
           </a:xfrm>
           <a:prstGeom prst="rect">
             <a:avLst/>
@@ -5043,7 +5263,7 @@
             <a:r>
               <a:rPr sz="1500" b="0" i="0">
                 <a:solidFill>
-                  <a:srgbClr val="2B2B2B"/>
+                  <a:srgbClr val="26231F"/>
                 </a:solidFill>
               </a:rPr>
               <a:t>가장 즐거웠던 명절</a:t>
@@ -5053,20 +5273,20 @@
       </p:sp>
       <p:sp>
         <p:nvSpPr>
-          <p:cNvPr id="18" name="때 4"/>
+          <p:cNvPr id="20" name="때 4"/>
           <p:cNvSpPr/>
           <p:nvPr/>
         </p:nvSpPr>
         <p:spPr>
           <a:xfrm>
-            <a:off x="9849345" y="3108960"/>
+            <a:off x="9986505" y="3337560"/>
             <a:ext cx="402336" cy="402336"/>
           </a:xfrm>
           <a:prstGeom prst="ellipse">
             <a:avLst/>
           </a:prstGeom>
           <a:solidFill>
-            <a:srgbClr val="995229"/>
+            <a:srgbClr val="D89C79"/>
           </a:solidFill>
           <a:ln w="38100">
             <a:solidFill>
@@ -5084,14 +5304,14 @@
       </p:sp>
       <p:sp>
         <p:nvSpPr>
-          <p:cNvPr id="19" name="TextBox 18"/>
+          <p:cNvPr id="21" name="TextBox 20"/>
           <p:cNvSpPr txBox="1"/>
           <p:nvPr/>
         </p:nvSpPr>
         <p:spPr>
           <a:xfrm>
-            <a:off x="8778011" y="2468880"/>
-            <a:ext cx="2545003" cy="457200"/>
+            <a:off x="8869451" y="2697480"/>
+            <a:ext cx="2636443" cy="457200"/>
           </a:xfrm>
           <a:prstGeom prst="rect">
             <a:avLst/>
@@ -5112,7 +5332,7 @@
             <a:r>
               <a:rPr sz="1600" b="1" i="0">
                 <a:solidFill>
-                  <a:srgbClr val="995229"/>
+                  <a:srgbClr val="D89C79"/>
                 </a:solidFill>
               </a:rPr>
               <a:t>지금</a:t>
@@ -5122,14 +5342,14 @@
       </p:sp>
       <p:sp>
         <p:nvSpPr>
-          <p:cNvPr id="20" name="TextBox 19"/>
+          <p:cNvPr id="22" name="TextBox 21"/>
           <p:cNvSpPr txBox="1"/>
           <p:nvPr/>
         </p:nvSpPr>
         <p:spPr>
           <a:xfrm>
-            <a:off x="8823731" y="3657600"/>
-            <a:ext cx="2453563" cy="457200"/>
+            <a:off x="8915171" y="3886200"/>
+            <a:ext cx="2545003" cy="457200"/>
           </a:xfrm>
           <a:prstGeom prst="rect">
             <a:avLst/>
@@ -5150,7 +5370,7 @@
             <a:r>
               <a:rPr sz="1800" b="1" i="0">
                 <a:solidFill>
-                  <a:srgbClr val="492713"/>
+                  <a:srgbClr val="493427"/>
                 </a:solidFill>
               </a:rPr>
               <a:t>오늘의 우리</a:t>
@@ -5160,14 +5380,14 @@
       </p:sp>
       <p:sp>
         <p:nvSpPr>
-          <p:cNvPr id="21" name="TextBox 20"/>
+          <p:cNvPr id="23" name="TextBox 22"/>
           <p:cNvSpPr txBox="1"/>
           <p:nvPr/>
         </p:nvSpPr>
         <p:spPr>
           <a:xfrm>
-            <a:off x="8823731" y="4160520"/>
-            <a:ext cx="2453563" cy="1645920"/>
+            <a:off x="8915171" y="4389120"/>
+            <a:ext cx="2545003" cy="1645920"/>
           </a:xfrm>
           <a:prstGeom prst="rect">
             <a:avLst/>
@@ -5188,7 +5408,7 @@
             <a:r>
               <a:rPr sz="1500" b="0" i="0">
                 <a:solidFill>
-                  <a:srgbClr val="2B2B2B"/>
+                  <a:srgbClr val="26231F"/>
                 </a:solidFill>
               </a:rPr>
               <a:t>요즘 우리 이야기</a:t>
@@ -5210,7 +5430,7 @@
     <p:bg>
       <p:bgPr>
         <a:solidFill>
-          <a:srgbClr val="FBF3EF"/>
+          <a:srgbClr val="FFFFFF"/>
         </a:solidFill>
         <a:effectLst/>
       </p:bgPr>
@@ -5230,17 +5450,17 @@
         </p:nvSpPr>
         <p:spPr>
           <a:xfrm>
-            <a:off x="256032" y="256032"/>
-            <a:ext cx="11679631" cy="6345936"/>
+            <a:off x="0" y="6565392"/>
+            <a:ext cx="12191695" cy="292608"/>
           </a:xfrm>
           <a:prstGeom prst="rect">
             <a:avLst/>
           </a:prstGeom>
-          <a:noFill/>
-          <a:ln w="28575">
-            <a:solidFill>
-              <a:srgbClr val="995229"/>
-            </a:solidFill>
+          <a:solidFill>
+            <a:srgbClr val="EBC4AD"/>
+          </a:solidFill>
+          <a:ln>
+            <a:noFill/>
           </a:ln>
         </p:spPr>
         <p:txBody>
@@ -5259,17 +5479,86 @@
         </p:nvSpPr>
         <p:spPr>
           <a:xfrm>
-            <a:off x="384048" y="384048"/>
-            <a:ext cx="11423599" cy="6089904"/>
+            <a:off x="640080" y="566928"/>
+            <a:ext cx="64008" cy="868680"/>
+          </a:xfrm>
+          <a:prstGeom prst="roundRect">
+            <a:avLst>
+              <a:gd name="adj" fmla="val 50000"/>
+            </a:avLst>
+          </a:prstGeom>
+          <a:solidFill>
+            <a:srgbClr val="D89C79"/>
+          </a:solidFill>
+          <a:ln>
+            <a:noFill/>
+          </a:ln>
+        </p:spPr>
+        <p:txBody>
+          <a:bodyPr rtlCol="0" anchor="ctr"/>
+          <a:lstStyle/>
+          <a:p>
+            <a:pPr algn="ctr"/>
+          </a:p>
+        </p:txBody>
+      </p:sp>
+      <p:sp>
+        <p:nvSpPr>
+          <p:cNvPr id="5" name="상단 라벨"/>
+          <p:cNvSpPr txBox="1"/>
+          <p:nvPr/>
+        </p:nvSpPr>
+        <p:spPr>
+          <a:xfrm>
+            <a:off x="868680" y="274320"/>
+            <a:ext cx="5486400" cy="274320"/>
           </a:xfrm>
           <a:prstGeom prst="rect">
             <a:avLst/>
           </a:prstGeom>
           <a:noFill/>
-          <a:ln w="9525">
-            <a:solidFill>
-              <a:srgbClr val="F4DBCD"/>
-            </a:solidFill>
+        </p:spPr>
+        <p:txBody>
+          <a:bodyPr wrap="square" lIns="54864" rIns="54864" tIns="27432" bIns="27432" anchor="ctr">
+            <a:noAutofit/>
+          </a:bodyPr>
+          <a:lstStyle/>
+          <a:p>
+            <a:pPr algn="l">
+              <a:lnSpc>
+                <a:spcPct val="115000"/>
+              </a:lnSpc>
+            </a:pPr>
+            <a:r>
+              <a:rPr sz="900" b="1" i="0" spc="250">
+                <a:solidFill>
+                  <a:srgbClr val="8E8780"/>
+                </a:solidFill>
+              </a:rPr>
+              <a:t>FAMILY ALBUM</a:t>
+            </a:r>
+          </a:p>
+        </p:txBody>
+      </p:sp>
+      <p:sp>
+        <p:nvSpPr>
+          <p:cNvPr id="6" name="포인트"/>
+          <p:cNvSpPr/>
+          <p:nvPr/>
+        </p:nvSpPr>
+        <p:spPr>
+          <a:xfrm>
+            <a:off x="11167567" y="667512"/>
+            <a:ext cx="310896" cy="310896"/>
+          </a:xfrm>
+          <a:prstGeom prst="donut">
+            <a:avLst/>
+          </a:prstGeom>
+          <a:solidFill>
+            <a:srgbClr val="EBC4AD"/>
+          </a:solidFill>
+          <a:ln>
+            <a:noFill/>
           </a:ln>
         </p:spPr>
         <p:txBody>
@@ -5292,8 +5581,8 @@
         </p:nvSpPr>
         <p:spPr>
           <a:xfrm>
-            <a:off x="822960" y="548640"/>
-            <a:ext cx="9265615" cy="822960"/>
+            <a:off x="868680" y="566928"/>
+            <a:ext cx="9448495" cy="868680"/>
           </a:xfrm>
         </p:spPr>
         <p:txBody>
@@ -5310,7 +5599,7 @@
             <a:r>
               <a:rPr sz="3000" b="1" i="0">
                 <a:solidFill>
-                  <a:srgbClr val="492713"/>
+                  <a:srgbClr val="26231F"/>
                 </a:solidFill>
               </a:rPr>
               <a:t>우리 가족의 약속</a:t>
@@ -5320,26 +5609,24 @@
       </p:sp>
       <p:sp>
         <p:nvSpPr>
-          <p:cNvPr id="5" name="줄 1"/>
+          <p:cNvPr id="7" name="줄 1"/>
           <p:cNvSpPr/>
           <p:nvPr/>
         </p:nvSpPr>
         <p:spPr>
           <a:xfrm>
-            <a:off x="822960" y="1554480"/>
-            <a:ext cx="10545775" cy="1005840"/>
+            <a:off x="640080" y="1783080"/>
+            <a:ext cx="10911535" cy="1005840"/>
           </a:xfrm>
           <a:prstGeom prst="roundRect">
             <a:avLst>
-              <a:gd name="adj" fmla="val 8000"/>
+              <a:gd name="adj" fmla="val 7000"/>
             </a:avLst>
           </a:prstGeom>
-          <a:solidFill>
-            <a:srgbClr val="FBF3EF"/>
-          </a:solidFill>
-          <a:ln w="12700">
+          <a:noFill/>
+          <a:ln w="15875">
             <a:solidFill>
-              <a:srgbClr val="F4DBCD"/>
+              <a:srgbClr val="D89C79"/>
             </a:solidFill>
           </a:ln>
         </p:spPr>
@@ -5353,23 +5640,23 @@
       </p:sp>
       <p:sp>
         <p:nvSpPr>
-          <p:cNvPr id="6" name="번호 1"/>
+          <p:cNvPr id="8" name="번호 1"/>
           <p:cNvSpPr/>
           <p:nvPr/>
         </p:nvSpPr>
         <p:spPr>
           <a:xfrm>
-            <a:off x="1005840" y="1828800"/>
+            <a:off x="822959" y="2057400"/>
             <a:ext cx="457200" cy="457200"/>
           </a:xfrm>
           <a:prstGeom prst="ellipse">
             <a:avLst/>
           </a:prstGeom>
-          <a:solidFill>
-            <a:srgbClr val="995229"/>
-          </a:solidFill>
-          <a:ln>
-            <a:noFill/>
+          <a:noFill/>
+          <a:ln w="19050">
+            <a:solidFill>
+              <a:srgbClr val="D89C79"/>
+            </a:solidFill>
           </a:ln>
         </p:spPr>
         <p:txBody>
@@ -5386,7 +5673,7 @@
             <a:r>
               <a:rPr sz="1600" b="1" i="0">
                 <a:solidFill>
-                  <a:srgbClr val="FFFFFF"/>
+                  <a:srgbClr val="493427"/>
                 </a:solidFill>
               </a:rPr>
               <a:t>1</a:t>
@@ -5396,13 +5683,13 @@
       </p:sp>
       <p:sp>
         <p:nvSpPr>
-          <p:cNvPr id="7" name="TextBox 6"/>
+          <p:cNvPr id="9" name="TextBox 8"/>
           <p:cNvSpPr txBox="1"/>
           <p:nvPr/>
         </p:nvSpPr>
         <p:spPr>
           <a:xfrm>
-            <a:off x="1691640" y="1600200"/>
+            <a:off x="1508760" y="1828800"/>
             <a:ext cx="2743200" cy="914400"/>
           </a:xfrm>
           <a:prstGeom prst="rect">
@@ -5424,7 +5711,7 @@
             <a:r>
               <a:rPr sz="1800" b="1" i="0">
                 <a:solidFill>
-                  <a:srgbClr val="492713"/>
+                  <a:srgbClr val="493427"/>
                 </a:solidFill>
               </a:rPr>
               <a:t>약속 1</a:t>
@@ -5434,14 +5721,14 @@
       </p:sp>
       <p:sp>
         <p:nvSpPr>
-          <p:cNvPr id="8" name="TextBox 7"/>
+          <p:cNvPr id="10" name="TextBox 9"/>
           <p:cNvSpPr txBox="1"/>
           <p:nvPr/>
         </p:nvSpPr>
         <p:spPr>
           <a:xfrm>
-            <a:off x="4480560" y="1600200"/>
-            <a:ext cx="6705295" cy="914400"/>
+            <a:off x="4297680" y="1828800"/>
+            <a:ext cx="7071055" cy="914400"/>
           </a:xfrm>
           <a:prstGeom prst="rect">
             <a:avLst/>
@@ -5462,7 +5749,7 @@
             <a:r>
               <a:rPr sz="1700" b="0" i="0">
                 <a:solidFill>
-                  <a:srgbClr val="2B2B2B"/>
+                  <a:srgbClr val="26231F"/>
                 </a:solidFill>
               </a:rPr>
               <a:t>명절에는 모두 한자리에 모이기</a:t>
@@ -5472,26 +5759,24 @@
       </p:sp>
       <p:sp>
         <p:nvSpPr>
-          <p:cNvPr id="9" name="줄 2"/>
+          <p:cNvPr id="11" name="줄 2"/>
           <p:cNvSpPr/>
           <p:nvPr/>
         </p:nvSpPr>
         <p:spPr>
           <a:xfrm>
-            <a:off x="822960" y="2697480"/>
-            <a:ext cx="10545775" cy="1005840"/>
+            <a:off x="640080" y="2926080"/>
+            <a:ext cx="10911535" cy="1005840"/>
           </a:xfrm>
           <a:prstGeom prst="roundRect">
             <a:avLst>
-              <a:gd name="adj" fmla="val 8000"/>
+              <a:gd name="adj" fmla="val 7000"/>
             </a:avLst>
           </a:prstGeom>
-          <a:solidFill>
-            <a:srgbClr val="FBF3EF"/>
-          </a:solidFill>
-          <a:ln w="12700">
+          <a:noFill/>
+          <a:ln w="15875">
             <a:solidFill>
-              <a:srgbClr val="F4DBCD"/>
+              <a:srgbClr val="D89C79"/>
             </a:solidFill>
           </a:ln>
         </p:spPr>
@@ -5505,23 +5790,23 @@
       </p:sp>
       <p:sp>
         <p:nvSpPr>
-          <p:cNvPr id="10" name="번호 2"/>
+          <p:cNvPr id="12" name="번호 2"/>
           <p:cNvSpPr/>
           <p:nvPr/>
         </p:nvSpPr>
         <p:spPr>
           <a:xfrm>
-            <a:off x="1005840" y="2971800"/>
+            <a:off x="822959" y="3200400"/>
             <a:ext cx="457200" cy="457200"/>
           </a:xfrm>
           <a:prstGeom prst="ellipse">
             <a:avLst/>
           </a:prstGeom>
-          <a:solidFill>
-            <a:srgbClr val="995229"/>
-          </a:solidFill>
-          <a:ln>
-            <a:noFill/>
+          <a:noFill/>
+          <a:ln w="19050">
+            <a:solidFill>
+              <a:srgbClr val="D89C79"/>
+            </a:solidFill>
           </a:ln>
         </p:spPr>
         <p:txBody>
@@ -5538,7 +5823,7 @@
             <a:r>
               <a:rPr sz="1600" b="1" i="0">
                 <a:solidFill>
-                  <a:srgbClr val="FFFFFF"/>
+                  <a:srgbClr val="493427"/>
                 </a:solidFill>
               </a:rPr>
               <a:t>2</a:t>
@@ -5548,13 +5833,13 @@
       </p:sp>
       <p:sp>
         <p:nvSpPr>
-          <p:cNvPr id="11" name="TextBox 10"/>
+          <p:cNvPr id="13" name="TextBox 12"/>
           <p:cNvSpPr txBox="1"/>
           <p:nvPr/>
         </p:nvSpPr>
         <p:spPr>
           <a:xfrm>
-            <a:off x="1691640" y="2743200"/>
+            <a:off x="1508760" y="2971800"/>
             <a:ext cx="2743200" cy="914400"/>
           </a:xfrm>
           <a:prstGeom prst="rect">
@@ -5576,7 +5861,7 @@
             <a:r>
               <a:rPr sz="1800" b="1" i="0">
                 <a:solidFill>
-                  <a:srgbClr val="492713"/>
+                  <a:srgbClr val="493427"/>
                 </a:solidFill>
               </a:rPr>
               <a:t>약속 2</a:t>
@@ -5586,14 +5871,14 @@
       </p:sp>
       <p:sp>
         <p:nvSpPr>
-          <p:cNvPr id="12" name="TextBox 11"/>
+          <p:cNvPr id="14" name="TextBox 13"/>
           <p:cNvSpPr txBox="1"/>
           <p:nvPr/>
         </p:nvSpPr>
         <p:spPr>
           <a:xfrm>
-            <a:off x="4480560" y="2743200"/>
-            <a:ext cx="6705295" cy="914400"/>
+            <a:off x="4297680" y="2971800"/>
+            <a:ext cx="7071055" cy="914400"/>
           </a:xfrm>
           <a:prstGeom prst="rect">
             <a:avLst/>
@@ -5614,7 +5899,7 @@
             <a:r>
               <a:rPr sz="1700" b="0" i="0">
                 <a:solidFill>
-                  <a:srgbClr val="2B2B2B"/>
+                  <a:srgbClr val="26231F"/>
                 </a:solidFill>
               </a:rPr>
               <a:t>어른께 먼저 안부 전하기</a:t>
@@ -5624,26 +5909,24 @@
       </p:sp>
       <p:sp>
         <p:nvSpPr>
-          <p:cNvPr id="13" name="줄 3"/>
+          <p:cNvPr id="15" name="줄 3"/>
           <p:cNvSpPr/>
           <p:nvPr/>
         </p:nvSpPr>
         <p:spPr>
           <a:xfrm>
-            <a:off x="822960" y="3840480"/>
-            <a:ext cx="10545775" cy="1005840"/>
+            <a:off x="640080" y="4069080"/>
+            <a:ext cx="10911535" cy="1005840"/>
           </a:xfrm>
           <a:prstGeom prst="roundRect">
             <a:avLst>
-              <a:gd name="adj" fmla="val 8000"/>
+              <a:gd name="adj" fmla="val 7000"/>
             </a:avLst>
           </a:prstGeom>
-          <a:solidFill>
-            <a:srgbClr val="FBF3EF"/>
-          </a:solidFill>
-          <a:ln w="12700">
+          <a:noFill/>
+          <a:ln w="15875">
             <a:solidFill>
-              <a:srgbClr val="F4DBCD"/>
+              <a:srgbClr val="D89C79"/>
             </a:solidFill>
           </a:ln>
         </p:spPr>
@@ -5657,23 +5940,23 @@
       </p:sp>
       <p:sp>
         <p:nvSpPr>
-          <p:cNvPr id="14" name="번호 3"/>
+          <p:cNvPr id="16" name="번호 3"/>
           <p:cNvSpPr/>
           <p:nvPr/>
         </p:nvSpPr>
         <p:spPr>
           <a:xfrm>
-            <a:off x="1005840" y="4114800"/>
+            <a:off x="822959" y="4343400"/>
             <a:ext cx="457200" cy="457200"/>
           </a:xfrm>
           <a:prstGeom prst="ellipse">
             <a:avLst/>
           </a:prstGeom>
-          <a:solidFill>
-            <a:srgbClr val="995229"/>
-          </a:solidFill>
-          <a:ln>
-            <a:noFill/>
+          <a:noFill/>
+          <a:ln w="19050">
+            <a:solidFill>
+              <a:srgbClr val="D89C79"/>
+            </a:solidFill>
           </a:ln>
         </p:spPr>
         <p:txBody>
@@ -5690,7 +5973,7 @@
             <a:r>
               <a:rPr sz="1600" b="1" i="0">
                 <a:solidFill>
-                  <a:srgbClr val="FFFFFF"/>
+                  <a:srgbClr val="493427"/>
                 </a:solidFill>
               </a:rPr>
               <a:t>3</a:t>
@@ -5700,13 +5983,13 @@
       </p:sp>
       <p:sp>
         <p:nvSpPr>
-          <p:cNvPr id="15" name="TextBox 14"/>
+          <p:cNvPr id="17" name="TextBox 16"/>
           <p:cNvSpPr txBox="1"/>
           <p:nvPr/>
         </p:nvSpPr>
         <p:spPr>
           <a:xfrm>
-            <a:off x="1691640" y="3886200"/>
+            <a:off x="1508760" y="4114800"/>
             <a:ext cx="2743200" cy="914400"/>
           </a:xfrm>
           <a:prstGeom prst="rect">
@@ -5728,7 +6011,7 @@
             <a:r>
               <a:rPr sz="1800" b="1" i="0">
                 <a:solidFill>
-                  <a:srgbClr val="492713"/>
+                  <a:srgbClr val="493427"/>
                 </a:solidFill>
               </a:rPr>
               <a:t>약속 3</a:t>
@@ -5738,14 +6021,14 @@
       </p:sp>
       <p:sp>
         <p:nvSpPr>
-          <p:cNvPr id="16" name="TextBox 15"/>
+          <p:cNvPr id="18" name="TextBox 17"/>
           <p:cNvSpPr txBox="1"/>
           <p:nvPr/>
         </p:nvSpPr>
         <p:spPr>
           <a:xfrm>
-            <a:off x="4480560" y="3886200"/>
-            <a:ext cx="6705295" cy="914400"/>
+            <a:off x="4297680" y="4114800"/>
+            <a:ext cx="7071055" cy="914400"/>
           </a:xfrm>
           <a:prstGeom prst="rect">
             <a:avLst/>
@@ -5766,7 +6049,7 @@
             <a:r>
               <a:rPr sz="1700" b="0" i="0">
                 <a:solidFill>
-                  <a:srgbClr val="2B2B2B"/>
+                  <a:srgbClr val="26231F"/>
                 </a:solidFill>
               </a:rPr>
               <a:t>한 달에 한 번 가족 식사</a:t>
@@ -5788,7 +6071,7 @@
     <p:bg>
       <p:bgPr>
         <a:solidFill>
-          <a:srgbClr val="FBF3EF"/>
+          <a:srgbClr val="FFFFFF"/>
         </a:solidFill>
         <a:effectLst/>
       </p:bgPr>
@@ -5808,17 +6091,17 @@
         </p:nvSpPr>
         <p:spPr>
           <a:xfrm>
-            <a:off x="256032" y="256032"/>
-            <a:ext cx="11679631" cy="6345936"/>
+            <a:off x="0" y="6565392"/>
+            <a:ext cx="12191695" cy="292608"/>
           </a:xfrm>
           <a:prstGeom prst="rect">
             <a:avLst/>
           </a:prstGeom>
-          <a:noFill/>
-          <a:ln w="28575">
-            <a:solidFill>
-              <a:srgbClr val="995229"/>
-            </a:solidFill>
+          <a:solidFill>
+            <a:srgbClr val="EBC4AD"/>
+          </a:solidFill>
+          <a:ln>
+            <a:noFill/>
           </a:ln>
         </p:spPr>
         <p:txBody>
@@ -5837,17 +6120,86 @@
         </p:nvSpPr>
         <p:spPr>
           <a:xfrm>
-            <a:off x="384048" y="384048"/>
-            <a:ext cx="11423599" cy="6089904"/>
+            <a:off x="640080" y="566928"/>
+            <a:ext cx="64008" cy="868680"/>
+          </a:xfrm>
+          <a:prstGeom prst="roundRect">
+            <a:avLst>
+              <a:gd name="adj" fmla="val 50000"/>
+            </a:avLst>
+          </a:prstGeom>
+          <a:solidFill>
+            <a:srgbClr val="D89C79"/>
+          </a:solidFill>
+          <a:ln>
+            <a:noFill/>
+          </a:ln>
+        </p:spPr>
+        <p:txBody>
+          <a:bodyPr rtlCol="0" anchor="ctr"/>
+          <a:lstStyle/>
+          <a:p>
+            <a:pPr algn="ctr"/>
+          </a:p>
+        </p:txBody>
+      </p:sp>
+      <p:sp>
+        <p:nvSpPr>
+          <p:cNvPr id="5" name="상단 라벨"/>
+          <p:cNvSpPr txBox="1"/>
+          <p:nvPr/>
+        </p:nvSpPr>
+        <p:spPr>
+          <a:xfrm>
+            <a:off x="868680" y="274320"/>
+            <a:ext cx="5486400" cy="274320"/>
           </a:xfrm>
           <a:prstGeom prst="rect">
             <a:avLst/>
           </a:prstGeom>
           <a:noFill/>
-          <a:ln w="9525">
-            <a:solidFill>
-              <a:srgbClr val="F4DBCD"/>
-            </a:solidFill>
+        </p:spPr>
+        <p:txBody>
+          <a:bodyPr wrap="square" lIns="54864" rIns="54864" tIns="27432" bIns="27432" anchor="ctr">
+            <a:noAutofit/>
+          </a:bodyPr>
+          <a:lstStyle/>
+          <a:p>
+            <a:pPr algn="l">
+              <a:lnSpc>
+                <a:spcPct val="115000"/>
+              </a:lnSpc>
+            </a:pPr>
+            <a:r>
+              <a:rPr sz="900" b="1" i="0" spc="250">
+                <a:solidFill>
+                  <a:srgbClr val="8E8780"/>
+                </a:solidFill>
+              </a:rPr>
+              <a:t>FAMILY ALBUM</a:t>
+            </a:r>
+          </a:p>
+        </p:txBody>
+      </p:sp>
+      <p:sp>
+        <p:nvSpPr>
+          <p:cNvPr id="6" name="포인트"/>
+          <p:cNvSpPr/>
+          <p:nvPr/>
+        </p:nvSpPr>
+        <p:spPr>
+          <a:xfrm>
+            <a:off x="11167567" y="667512"/>
+            <a:ext cx="310896" cy="310896"/>
+          </a:xfrm>
+          <a:prstGeom prst="donut">
+            <a:avLst/>
+          </a:prstGeom>
+          <a:solidFill>
+            <a:srgbClr val="EBC4AD"/>
+          </a:solidFill>
+          <a:ln>
+            <a:noFill/>
           </a:ln>
         </p:spPr>
         <p:txBody>
@@ -5870,8 +6222,8 @@
         </p:nvSpPr>
         <p:spPr>
           <a:xfrm>
-            <a:off x="822960" y="548640"/>
-            <a:ext cx="9265615" cy="822960"/>
+            <a:off x="868680" y="566928"/>
+            <a:ext cx="9448495" cy="868680"/>
           </a:xfrm>
         </p:spPr>
         <p:txBody>
@@ -5888,7 +6240,7 @@
             <a:r>
               <a:rPr sz="3000" b="1" i="0">
                 <a:solidFill>
-                  <a:srgbClr val="492713"/>
+                  <a:srgbClr val="26231F"/>
                 </a:solidFill>
               </a:rPr>
               <a:t>가족 사진</a:t>
@@ -5898,14 +6250,14 @@
       </p:sp>
       <p:sp>
         <p:nvSpPr>
-          <p:cNvPr id="5" name="사진 자리"/>
+          <p:cNvPr id="7" name="사진 자리"/>
           <p:cNvSpPr/>
           <p:nvPr/>
         </p:nvSpPr>
         <p:spPr>
           <a:xfrm>
-            <a:off x="822960" y="1554480"/>
-            <a:ext cx="3393338" cy="2217420"/>
+            <a:off x="640080" y="1783080"/>
+            <a:ext cx="3515258" cy="2103120"/>
           </a:xfrm>
           <a:prstGeom prst="roundRect">
             <a:avLst>
@@ -5913,12 +6265,10 @@
             </a:avLst>
           </a:prstGeom>
           <a:solidFill>
-            <a:srgbClr val="F4DBCD"/>
+            <a:srgbClr val="F6E1D5"/>
           </a:solidFill>
           <a:ln w="19050">
-            <a:solidFill>
-              <a:srgbClr val="995229"/>
-            </a:solidFill>
+            <a:noFill/>
             <a:prstDash val="dash"/>
           </a:ln>
         </p:spPr>
@@ -5936,7 +6286,7 @@
             <a:r>
               <a:rPr sz="1200" b="0" i="0">
                 <a:solidFill>
-                  <a:srgbClr val="492713"/>
+                  <a:srgbClr val="8E8780"/>
                 </a:solidFill>
               </a:rPr>
               <a:t>사진 1</a:t>
@@ -5946,14 +6296,14 @@
       </p:sp>
       <p:sp>
         <p:nvSpPr>
-          <p:cNvPr id="6" name="사진 자리"/>
+          <p:cNvPr id="8" name="사진 자리"/>
           <p:cNvSpPr/>
           <p:nvPr/>
         </p:nvSpPr>
         <p:spPr>
           <a:xfrm>
-            <a:off x="4399178" y="1554480"/>
-            <a:ext cx="3393338" cy="2217420"/>
+            <a:off x="4338218" y="1783080"/>
+            <a:ext cx="3515258" cy="2103120"/>
           </a:xfrm>
           <a:prstGeom prst="roundRect">
             <a:avLst>
@@ -5961,12 +6311,10 @@
             </a:avLst>
           </a:prstGeom>
           <a:solidFill>
-            <a:srgbClr val="F4DBCD"/>
+            <a:srgbClr val="F6E1D5"/>
           </a:solidFill>
           <a:ln w="19050">
-            <a:solidFill>
-              <a:srgbClr val="995229"/>
-            </a:solidFill>
+            <a:noFill/>
             <a:prstDash val="dash"/>
           </a:ln>
         </p:spPr>
@@ -5984,7 +6332,7 @@
             <a:r>
               <a:rPr sz="1200" b="0" i="0">
                 <a:solidFill>
-                  <a:srgbClr val="492713"/>
+                  <a:srgbClr val="8E8780"/>
                 </a:solidFill>
               </a:rPr>
               <a:t>사진 2</a:t>
@@ -5994,14 +6342,14 @@
       </p:sp>
       <p:sp>
         <p:nvSpPr>
-          <p:cNvPr id="7" name="사진 자리"/>
+          <p:cNvPr id="9" name="사진 자리"/>
           <p:cNvSpPr/>
           <p:nvPr/>
         </p:nvSpPr>
         <p:spPr>
           <a:xfrm>
-            <a:off x="7975396" y="1554480"/>
-            <a:ext cx="3393338" cy="2217420"/>
+            <a:off x="8036356" y="1783080"/>
+            <a:ext cx="3515258" cy="2103120"/>
           </a:xfrm>
           <a:prstGeom prst="roundRect">
             <a:avLst>
@@ -6009,12 +6357,10 @@
             </a:avLst>
           </a:prstGeom>
           <a:solidFill>
-            <a:srgbClr val="F4DBCD"/>
+            <a:srgbClr val="F6E1D5"/>
           </a:solidFill>
           <a:ln w="19050">
-            <a:solidFill>
-              <a:srgbClr val="995229"/>
-            </a:solidFill>
+            <a:noFill/>
             <a:prstDash val="dash"/>
           </a:ln>
         </p:spPr>
@@ -6032,7 +6378,7 @@
             <a:r>
               <a:rPr sz="1200" b="0" i="0">
                 <a:solidFill>
-                  <a:srgbClr val="492713"/>
+                  <a:srgbClr val="8E8780"/>
                 </a:solidFill>
               </a:rPr>
               <a:t>사진 3</a:t>
@@ -6042,14 +6388,14 @@
       </p:sp>
       <p:sp>
         <p:nvSpPr>
-          <p:cNvPr id="8" name="사진 자리"/>
+          <p:cNvPr id="10" name="사진 자리"/>
           <p:cNvSpPr/>
           <p:nvPr/>
         </p:nvSpPr>
         <p:spPr>
           <a:xfrm>
-            <a:off x="822960" y="3954780"/>
-            <a:ext cx="3393338" cy="2217420"/>
+            <a:off x="640080" y="4069080"/>
+            <a:ext cx="3515258" cy="2103120"/>
           </a:xfrm>
           <a:prstGeom prst="roundRect">
             <a:avLst>
@@ -6057,12 +6403,10 @@
             </a:avLst>
           </a:prstGeom>
           <a:solidFill>
-            <a:srgbClr val="F4DBCD"/>
+            <a:srgbClr val="F6E1D5"/>
           </a:solidFill>
           <a:ln w="19050">
-            <a:solidFill>
-              <a:srgbClr val="995229"/>
-            </a:solidFill>
+            <a:noFill/>
             <a:prstDash val="dash"/>
           </a:ln>
         </p:spPr>
@@ -6080,7 +6424,7 @@
             <a:r>
               <a:rPr sz="1200" b="0" i="0">
                 <a:solidFill>
-                  <a:srgbClr val="492713"/>
+                  <a:srgbClr val="8E8780"/>
                 </a:solidFill>
               </a:rPr>
               <a:t>사진 4</a:t>
@@ -6090,14 +6434,14 @@
       </p:sp>
       <p:sp>
         <p:nvSpPr>
-          <p:cNvPr id="9" name="사진 자리"/>
+          <p:cNvPr id="11" name="사진 자리"/>
           <p:cNvSpPr/>
           <p:nvPr/>
         </p:nvSpPr>
         <p:spPr>
           <a:xfrm>
-            <a:off x="4399178" y="3954780"/>
-            <a:ext cx="3393338" cy="2217420"/>
+            <a:off x="4338218" y="4069080"/>
+            <a:ext cx="3515258" cy="2103120"/>
           </a:xfrm>
           <a:prstGeom prst="roundRect">
             <a:avLst>
@@ -6105,12 +6449,10 @@
             </a:avLst>
           </a:prstGeom>
           <a:solidFill>
-            <a:srgbClr val="F4DBCD"/>
+            <a:srgbClr val="F6E1D5"/>
           </a:solidFill>
           <a:ln w="19050">
-            <a:solidFill>
-              <a:srgbClr val="995229"/>
-            </a:solidFill>
+            <a:noFill/>
             <a:prstDash val="dash"/>
           </a:ln>
         </p:spPr>
@@ -6128,7 +6470,7 @@
             <a:r>
               <a:rPr sz="1200" b="0" i="0">
                 <a:solidFill>
-                  <a:srgbClr val="492713"/>
+                  <a:srgbClr val="8E8780"/>
                 </a:solidFill>
               </a:rPr>
               <a:t>사진 5</a:t>
@@ -6138,14 +6480,14 @@
       </p:sp>
       <p:sp>
         <p:nvSpPr>
-          <p:cNvPr id="10" name="사진 자리"/>
+          <p:cNvPr id="12" name="사진 자리"/>
           <p:cNvSpPr/>
           <p:nvPr/>
         </p:nvSpPr>
         <p:spPr>
           <a:xfrm>
-            <a:off x="7975396" y="3954780"/>
-            <a:ext cx="3393338" cy="2217420"/>
+            <a:off x="8036356" y="4069080"/>
+            <a:ext cx="3515258" cy="2103120"/>
           </a:xfrm>
           <a:prstGeom prst="roundRect">
             <a:avLst>
@@ -6153,12 +6495,10 @@
             </a:avLst>
           </a:prstGeom>
           <a:solidFill>
-            <a:srgbClr val="F4DBCD"/>
+            <a:srgbClr val="F6E1D5"/>
           </a:solidFill>
           <a:ln w="19050">
-            <a:solidFill>
-              <a:srgbClr val="995229"/>
-            </a:solidFill>
+            <a:noFill/>
             <a:prstDash val="dash"/>
           </a:ln>
         </p:spPr>
@@ -6176,7 +6516,7 @@
             <a:r>
               <a:rPr sz="1200" b="0" i="0">
                 <a:solidFill>
-                  <a:srgbClr val="492713"/>
+                  <a:srgbClr val="8E8780"/>
                 </a:solidFill>
               </a:rPr>
               <a:t>사진 6</a:t>
@@ -6195,6 +6535,14 @@
 <file path=ppt/slides/slide6.xml><?xml version="1.0" encoding="utf-8"?>
 <p:sld xmlns:a="http://schemas.openxmlformats.org/drawingml/2006/main" xmlns:p="http://schemas.openxmlformats.org/presentationml/2006/main" xmlns:r="http://schemas.openxmlformats.org/officeDocument/2006/relationships">
   <p:cSld>
+    <p:bg>
+      <p:bgPr>
+        <a:solidFill>
+          <a:srgbClr val="F6E1D5"/>
+        </a:solidFill>
+        <a:effectLst/>
+      </p:bgPr>
+    </p:bg>
     <p:spTree>
       <p:nvGrpSpPr>
         <p:cNvPr id="1" name=""/>
@@ -6202,30 +6550,116 @@
         <p:nvPr/>
       </p:nvGrpSpPr>
       <p:grpSpPr/>
-      <p:pic>
-        <p:nvPicPr>
-          <p:cNvPr id="3" name="표지 그림" descr="family-38.jpg"/>
-          <p:cNvPicPr>
-            <a:picLocks noChangeAspect="1"/>
-          </p:cNvPicPr>
-          <p:nvPr/>
-        </p:nvPicPr>
-        <p:blipFill>
-          <a:blip r:embed="rId2"/>
-          <a:stretch>
-            <a:fillRect/>
-          </a:stretch>
-        </p:blipFill>
-        <p:spPr>
-          <a:xfrm>
-            <a:off x="0" y="0"/>
-            <a:ext cx="12191695" cy="6858000"/>
+      <p:sp>
+        <p:nvSpPr>
+          <p:cNvPr id="3" name="사진 자리"/>
+          <p:cNvSpPr/>
+          <p:nvPr/>
+        </p:nvSpPr>
+        <p:spPr>
+          <a:xfrm>
+            <a:off x="7802684" y="0"/>
+            <a:ext cx="4389010" cy="6858000"/>
           </a:xfrm>
           <a:prstGeom prst="rect">
             <a:avLst/>
           </a:prstGeom>
-        </p:spPr>
-      </p:pic>
+          <a:solidFill>
+            <a:srgbClr val="EBC4AD"/>
+          </a:solidFill>
+          <a:ln>
+            <a:noFill/>
+          </a:ln>
+        </p:spPr>
+        <p:txBody>
+          <a:bodyPr rtlCol="0" anchor="ctr" wrap="square" lIns="54864" rIns="54864" tIns="27432" bIns="27432">
+            <a:noAutofit/>
+          </a:bodyPr>
+          <a:lstStyle/>
+          <a:p>
+            <a:pPr algn="ctr">
+              <a:lnSpc>
+                <a:spcPct val="100000"/>
+              </a:lnSpc>
+            </a:pPr>
+            <a:r>
+              <a:rPr sz="1400" b="0" i="0">
+                <a:solidFill>
+                  <a:srgbClr val="493427"/>
+                </a:solidFill>
+              </a:rPr>
+              <a:t>사진을 넣어 주세요</a:t>
+            </a:r>
+          </a:p>
+        </p:txBody>
+      </p:sp>
+      <p:sp>
+        <p:nvSpPr>
+          <p:cNvPr id="4" name="장식"/>
+          <p:cNvSpPr/>
+          <p:nvPr/>
+        </p:nvSpPr>
+        <p:spPr>
+          <a:xfrm>
+            <a:off x="8168435" y="365760"/>
+            <a:ext cx="3657508" cy="6126480"/>
+          </a:xfrm>
+          <a:prstGeom prst="rect">
+            <a:avLst/>
+          </a:prstGeom>
+          <a:noFill/>
+          <a:ln w="9525">
+            <a:solidFill>
+              <a:srgbClr val="26231F"/>
+            </a:solidFill>
+          </a:ln>
+        </p:spPr>
+        <p:txBody>
+          <a:bodyPr rtlCol="0" anchor="ctr"/>
+          <a:lstStyle/>
+          <a:p>
+            <a:pPr algn="ctr"/>
+          </a:p>
+        </p:txBody>
+      </p:sp>
+      <p:sp>
+        <p:nvSpPr>
+          <p:cNvPr id="5" name="라벨"/>
+          <p:cNvSpPr txBox="1"/>
+          <p:nvPr/>
+        </p:nvSpPr>
+        <p:spPr>
+          <a:xfrm>
+            <a:off x="822960" y="2148840"/>
+            <a:ext cx="5608179" cy="274320"/>
+          </a:xfrm>
+          <a:prstGeom prst="rect">
+            <a:avLst/>
+          </a:prstGeom>
+          <a:noFill/>
+        </p:spPr>
+        <p:txBody>
+          <a:bodyPr wrap="square" lIns="54864" rIns="54864" tIns="27432" bIns="27432" anchor="t">
+            <a:noAutofit/>
+          </a:bodyPr>
+          <a:lstStyle/>
+          <a:p>
+            <a:pPr algn="l">
+              <a:lnSpc>
+                <a:spcPct val="115000"/>
+              </a:lnSpc>
+            </a:pPr>
+            <a:r>
+              <a:rPr sz="1000" b="1" i="0" spc="250">
+                <a:solidFill>
+                  <a:srgbClr val="26231F"/>
+                </a:solidFill>
+              </a:rPr>
+              <a:t>FAMILY ALBUM</a:t>
+            </a:r>
+          </a:p>
+        </p:txBody>
+      </p:sp>
       <p:sp>
         <p:nvSpPr>
           <p:cNvPr id="2" name="Title 1"/>
@@ -6238,8 +6672,8 @@
         </p:nvSpPr>
         <p:spPr>
           <a:xfrm>
-            <a:off x="853418" y="2057400"/>
-            <a:ext cx="6095847" cy="1554480"/>
+            <a:off x="822960" y="2606040"/>
+            <a:ext cx="5608179" cy="1188720"/>
           </a:xfrm>
         </p:spPr>
         <p:txBody>
@@ -6254,9 +6688,9 @@
               </a:lnSpc>
             </a:pPr>
             <a:r>
-              <a:rPr sz="3600" b="1" i="0">
-                <a:solidFill>
-                  <a:srgbClr val="492713"/>
+              <a:rPr sz="4000" b="1" i="0">
+                <a:solidFill>
+                  <a:srgbClr val="26231F"/>
                 </a:solidFill>
               </a:rPr>
               <a:t>우리 가족 소개를 마칩니다</a:t>
@@ -6266,14 +6700,14 @@
       </p:sp>
       <p:sp>
         <p:nvSpPr>
-          <p:cNvPr id="4" name="한 줄 문구"/>
+          <p:cNvPr id="6" name="한 줄 문구"/>
           <p:cNvSpPr txBox="1"/>
           <p:nvPr/>
         </p:nvSpPr>
         <p:spPr>
           <a:xfrm>
-            <a:off x="853418" y="3749039"/>
-            <a:ext cx="6095847" cy="822960"/>
+            <a:off x="822960" y="3886200"/>
+            <a:ext cx="5608179" cy="822960"/>
           </a:xfrm>
           <a:prstGeom prst="rect">
             <a:avLst/>
@@ -6292,9 +6726,9 @@
               </a:lnSpc>
             </a:pPr>
             <a:r>
-              <a:rPr sz="1700" b="0" i="1">
-                <a:solidFill>
-                  <a:srgbClr val="492713"/>
+              <a:rPr sz="1700" b="0" i="0">
+                <a:solidFill>
+                  <a:srgbClr val="26231F"/>
                 </a:solidFill>
               </a:rPr>
               <a:t>읽어 주셔서 고맙습니다</a:t>
@@ -6304,14 +6738,14 @@
       </p:sp>
       <p:sp>
         <p:nvSpPr>
-          <p:cNvPr id="5" name="안내 문구"/>
+          <p:cNvPr id="7" name="안내 문구"/>
           <p:cNvSpPr txBox="1"/>
           <p:nvPr/>
         </p:nvSpPr>
         <p:spPr>
           <a:xfrm>
-            <a:off x="853418" y="4617720"/>
-            <a:ext cx="6095847" cy="914400"/>
+            <a:off x="822960" y="4754880"/>
+            <a:ext cx="5608179" cy="914400"/>
           </a:xfrm>
           <a:prstGeom prst="rect">
             <a:avLst/>
@@ -6332,7 +6766,7 @@
             <a:r>
               <a:rPr sz="1400" b="0" i="0">
                 <a:solidFill>
-                  <a:srgbClr val="666666"/>
+                  <a:srgbClr val="26231F"/>
                 </a:solidFill>
               </a:rPr>
               <a:t>고맙습니다 · 가족 이름</a:t>
@@ -6359,34 +6793,34 @@
         <a:sysClr val="window" lastClr="FFFFFF"/>
       </a:lt1>
       <a:dk2>
-        <a:srgbClr val="492713"/>
+        <a:srgbClr val="493427"/>
       </a:dk2>
       <a:lt2>
-        <a:srgbClr val="FBF3EF"/>
+        <a:srgbClr val="FBF2EC"/>
       </a:lt2>
       <a:accent1>
-        <a:srgbClr val="995229"/>
+        <a:srgbClr val="D89C79"/>
       </a:accent1>
       <a:accent2>
-        <a:srgbClr val="3B9185"/>
+        <a:srgbClr val="E1D598"/>
       </a:accent2>
       <a:accent3>
-        <a:srgbClr val="492713"/>
+        <a:srgbClr val="493427"/>
       </a:accent3>
       <a:accent4>
-        <a:srgbClr val="F4DBCD"/>
+        <a:srgbClr val="F6E1D5"/>
       </a:accent4>
       <a:accent5>
-        <a:srgbClr val="6A7257"/>
+        <a:srgbClr val="DCB888"/>
       </a:accent5>
       <a:accent6>
-        <a:srgbClr val="927D71"/>
+        <a:srgbClr val="92857D"/>
       </a:accent6>
       <a:hlink>
-        <a:srgbClr val="995229"/>
+        <a:srgbClr val="D89C79"/>
       </a:hlink>
       <a:folHlink>
-        <a:srgbClr val="492713"/>
+        <a:srgbClr val="493427"/>
       </a:folHlink>
     </a:clrScheme>
     <a:fontScheme name="Office">
